--- a/public/lessons/year-6-maths/summer/week-23/use-decimal-notation-in-conversions/teaching-powerpoint-v1.pptx
+++ b/public/lessons/year-6-maths/summer/week-23/use-decimal-notation-in-conversions/teaching-powerpoint-v1.pptx
@@ -2,24 +2,24 @@
 <file path=ppt/presentation.xml><?xml version="1.0" encoding="utf-8"?>
 <p:presentation xmlns:p="http://schemas.openxmlformats.org/presentationml/2006/main">
   <p:sldMasterIdLst>
-    <p:sldMasterId xmlns:r="http://schemas.openxmlformats.org/officeDocument/2006/relationships" id="2147483648" r:id="Re90f0d420b8b4789"/>
+    <p:sldMasterId xmlns:r="http://schemas.openxmlformats.org/officeDocument/2006/relationships" id="2147483648" r:id="R24cfa2c6c27442d0"/>
   </p:sldMasterIdLst>
   <p:notesMasterIdLst>
-    <p:notesMasterId xmlns:r="http://schemas.openxmlformats.org/officeDocument/2006/relationships" r:id="Re1b605ea0b954eb7"/>
+    <p:notesMasterId xmlns:r="http://schemas.openxmlformats.org/officeDocument/2006/relationships" r:id="Rcfb8e554d94e45b4"/>
   </p:notesMasterIdLst>
   <p:sldIdLst>
-    <p:sldId xmlns:r="http://schemas.openxmlformats.org/officeDocument/2006/relationships" id="256" r:id="R3f50ac0a15e947f0"/>
-    <p:sldId xmlns:r="http://schemas.openxmlformats.org/officeDocument/2006/relationships" id="257" r:id="R47b180025dac48e4"/>
-    <p:sldId xmlns:r="http://schemas.openxmlformats.org/officeDocument/2006/relationships" id="258" r:id="R939990f19b6543f7"/>
-    <p:sldId xmlns:r="http://schemas.openxmlformats.org/officeDocument/2006/relationships" id="259" r:id="R8a6e73f5d00849c8"/>
-    <p:sldId xmlns:r="http://schemas.openxmlformats.org/officeDocument/2006/relationships" id="260" r:id="R98705a1b15144739"/>
-    <p:sldId xmlns:r="http://schemas.openxmlformats.org/officeDocument/2006/relationships" id="261" r:id="R660e3573f51f4532"/>
-    <p:sldId xmlns:r="http://schemas.openxmlformats.org/officeDocument/2006/relationships" id="262" r:id="R3f7a31562bbf4150"/>
-    <p:sldId xmlns:r="http://schemas.openxmlformats.org/officeDocument/2006/relationships" id="263" r:id="R286066c74da749b8"/>
-    <p:sldId xmlns:r="http://schemas.openxmlformats.org/officeDocument/2006/relationships" id="264" r:id="R0d9beb1fcd5949eb"/>
-    <p:sldId xmlns:r="http://schemas.openxmlformats.org/officeDocument/2006/relationships" id="265" r:id="Ree22b552a3d54906"/>
-    <p:sldId xmlns:r="http://schemas.openxmlformats.org/officeDocument/2006/relationships" id="266" r:id="R15372717fc3f4e6d"/>
-    <p:sldId xmlns:r="http://schemas.openxmlformats.org/officeDocument/2006/relationships" id="267" r:id="R2e7da11c2c124b35"/>
+    <p:sldId xmlns:r="http://schemas.openxmlformats.org/officeDocument/2006/relationships" id="256" r:id="Re3402352d3204deb"/>
+    <p:sldId xmlns:r="http://schemas.openxmlformats.org/officeDocument/2006/relationships" id="257" r:id="R223798ec20154281"/>
+    <p:sldId xmlns:r="http://schemas.openxmlformats.org/officeDocument/2006/relationships" id="258" r:id="R85794916144c41cb"/>
+    <p:sldId xmlns:r="http://schemas.openxmlformats.org/officeDocument/2006/relationships" id="259" r:id="Raccf6ae736a84b71"/>
+    <p:sldId xmlns:r="http://schemas.openxmlformats.org/officeDocument/2006/relationships" id="260" r:id="R29a806b52a5348ca"/>
+    <p:sldId xmlns:r="http://schemas.openxmlformats.org/officeDocument/2006/relationships" id="261" r:id="Rc8dc5d2b742f4d0e"/>
+    <p:sldId xmlns:r="http://schemas.openxmlformats.org/officeDocument/2006/relationships" id="262" r:id="R534fc06bac044337"/>
+    <p:sldId xmlns:r="http://schemas.openxmlformats.org/officeDocument/2006/relationships" id="263" r:id="Rdca69fa2423d438f"/>
+    <p:sldId xmlns:r="http://schemas.openxmlformats.org/officeDocument/2006/relationships" id="264" r:id="Rf22675c8d9d44887"/>
+    <p:sldId xmlns:r="http://schemas.openxmlformats.org/officeDocument/2006/relationships" id="265" r:id="R17cd3a6ae8e9434d"/>
+    <p:sldId xmlns:r="http://schemas.openxmlformats.org/officeDocument/2006/relationships" id="266" r:id="R27ca065fb1d1470f"/>
+    <p:sldId xmlns:r="http://schemas.openxmlformats.org/officeDocument/2006/relationships" id="267" r:id="R65e1f5a70d43485f"/>
   </p:sldIdLst>
   <p:sldSz cx="12192000" cy="6858000"/>
   <p:notesSz cx="6858000" cy="9144000"/>
@@ -873,7 +873,7 @@
           <a:lstStyle xmlns:a="http://schemas.openxmlformats.org/drawingml/2006/main"/>
           <a:p xmlns:a="http://schemas.openxmlformats.org/drawingml/2006/main">
             <a:r>
-              <a:t>I do. Reveal the question, setup and each calculation stage one click at a time. Pupils watch before copying. Model answer: 0.845 m.</a:t>
+              <a:t>I do. Reveal the question, then reveal each mathematical change one click at a time. Point to the numbers and operation that changed before moving to the next line. Final answer: 0.845 m.</a:t>
             </a:r>
           </a:p>
         </p:txBody>
@@ -1291,7 +1291,7 @@
   </p:cSld>
   <p:clrMap bg1="lt1" tx1="dk1" bg2="lt2" tx2="dk2" accent1="accent1" accent2="accent2" accent3="accent3" accent4="accent4" accent5="accent5" accent6="accent6" hlink="hlink" folHlink="folHlink"/>
   <p:sldLayoutIdLst>
-    <p:sldLayoutId xmlns:r="http://schemas.openxmlformats.org/officeDocument/2006/relationships" id="2147483649" r:id="Ra1fb91e680bd48d6"/>
+    <p:sldLayoutId xmlns:r="http://schemas.openxmlformats.org/officeDocument/2006/relationships" id="2147483649" r:id="R50cf0b0c592e4e31"/>
   </p:sldLayoutIdLst>
   <p:txStyles>
     <p:titleStyle>
@@ -1842,7 +1842,7 @@
           <p:cNvPr id="12" name="">
             <a:extLst xmlns:a="http://schemas.openxmlformats.org/drawingml/2006/main">
               <a:ext uri="{FF2B5EF4-FFF2-40B4-BE49-F238E27FC236}">
-                <a16:creationId xmlns:a16="http://schemas.microsoft.com/office/drawing/2014/main" id="{8A8B6840-C2ED-4906-A577-BCE2F65C1729}"/>
+                <a16:creationId xmlns:a16="http://schemas.microsoft.com/office/drawing/2014/main" id="{D50D6DB0-7DC2-4412-906D-6774C3F7EFED}"/>
               </a:ext>
             </a:extLst>
           </p:cNvPr>
@@ -1874,7 +1874,7 @@
           <p:cNvPr id="2" name="">
             <a:extLst xmlns:a="http://schemas.openxmlformats.org/drawingml/2006/main">
               <a:ext uri="{FF2B5EF4-FFF2-40B4-BE49-F238E27FC236}">
-                <a16:creationId xmlns:a16="http://schemas.microsoft.com/office/drawing/2014/main" id="{49C40C94-053D-4EB7-804A-EF58FDA4A2DE}"/>
+                <a16:creationId xmlns:a16="http://schemas.microsoft.com/office/drawing/2014/main" id="{54C51F10-28D6-44C4-9232-DF0547E750CF}"/>
               </a:ext>
             </a:extLst>
           </p:cNvPr>
@@ -1931,7 +1931,7 @@
           <p:cNvPr id="3" name="">
             <a:extLst xmlns:a="http://schemas.openxmlformats.org/drawingml/2006/main">
               <a:ext uri="{FF2B5EF4-FFF2-40B4-BE49-F238E27FC236}">
-                <a16:creationId xmlns:a16="http://schemas.microsoft.com/office/drawing/2014/main" id="{B5E9950C-9624-49C2-9690-6BD02924E745}"/>
+                <a16:creationId xmlns:a16="http://schemas.microsoft.com/office/drawing/2014/main" id="{ED00C2CC-D5D2-46F8-A3E9-318033967527}"/>
               </a:ext>
             </a:extLst>
           </p:cNvPr>
@@ -1965,7 +1965,7 @@
           <p:cNvPr id="4" name="">
             <a:extLst xmlns:a="http://schemas.openxmlformats.org/drawingml/2006/main">
               <a:ext uri="{FF2B5EF4-FFF2-40B4-BE49-F238E27FC236}">
-                <a16:creationId xmlns:a16="http://schemas.microsoft.com/office/drawing/2014/main" id="{93A2E57F-D32F-44B4-9E13-9B73262B7AEE}"/>
+                <a16:creationId xmlns:a16="http://schemas.microsoft.com/office/drawing/2014/main" id="{36BC4C00-7688-4283-BB89-DE87715852B6}"/>
               </a:ext>
             </a:extLst>
           </p:cNvPr>
@@ -2022,7 +2022,7 @@
           <p:cNvPr id="5" name="">
             <a:extLst xmlns:a="http://schemas.openxmlformats.org/drawingml/2006/main">
               <a:ext uri="{FF2B5EF4-FFF2-40B4-BE49-F238E27FC236}">
-                <a16:creationId xmlns:a16="http://schemas.microsoft.com/office/drawing/2014/main" id="{F5DF66E5-BE79-4741-B5BF-3038F47E0525}"/>
+                <a16:creationId xmlns:a16="http://schemas.microsoft.com/office/drawing/2014/main" id="{BEFE44BB-FFAB-41FE-8F5D-2B6B9C222F73}"/>
               </a:ext>
             </a:extLst>
           </p:cNvPr>
@@ -2079,7 +2079,7 @@
           <p:cNvPr id="6" name="">
             <a:extLst xmlns:a="http://schemas.openxmlformats.org/drawingml/2006/main">
               <a:ext uri="{FF2B5EF4-FFF2-40B4-BE49-F238E27FC236}">
-                <a16:creationId xmlns:a16="http://schemas.microsoft.com/office/drawing/2014/main" id="{2025D2DB-240F-4240-9373-659E5E91790C}"/>
+                <a16:creationId xmlns:a16="http://schemas.microsoft.com/office/drawing/2014/main" id="{26657F1E-18A4-40B4-963D-9FD0B4B76CC6}"/>
               </a:ext>
             </a:extLst>
           </p:cNvPr>
@@ -2113,7 +2113,7 @@
           <p:cNvPr id="7" name="">
             <a:extLst xmlns:a="http://schemas.openxmlformats.org/drawingml/2006/main">
               <a:ext uri="{FF2B5EF4-FFF2-40B4-BE49-F238E27FC236}">
-                <a16:creationId xmlns:a16="http://schemas.microsoft.com/office/drawing/2014/main" id="{5EC43BAF-7D1E-4AB8-A4BA-47F7468E4F5F}"/>
+                <a16:creationId xmlns:a16="http://schemas.microsoft.com/office/drawing/2014/main" id="{176A1B46-E561-47F1-930F-B2521356ADBE}"/>
               </a:ext>
             </a:extLst>
           </p:cNvPr>
@@ -2170,7 +2170,7 @@
           <p:cNvPr id="8" name="">
             <a:extLst xmlns:a="http://schemas.openxmlformats.org/drawingml/2006/main">
               <a:ext uri="{FF2B5EF4-FFF2-40B4-BE49-F238E27FC236}">
-                <a16:creationId xmlns:a16="http://schemas.microsoft.com/office/drawing/2014/main" id="{9CCEE45A-8AE4-4857-900A-02BD382F7626}"/>
+                <a16:creationId xmlns:a16="http://schemas.microsoft.com/office/drawing/2014/main" id="{880EA0A6-6425-4B46-A473-7E9294741792}"/>
               </a:ext>
             </a:extLst>
           </p:cNvPr>
@@ -2227,7 +2227,7 @@
           <p:cNvPr id="9" name="">
             <a:extLst xmlns:a="http://schemas.openxmlformats.org/drawingml/2006/main">
               <a:ext uri="{FF2B5EF4-FFF2-40B4-BE49-F238E27FC236}">
-                <a16:creationId xmlns:a16="http://schemas.microsoft.com/office/drawing/2014/main" id="{14F1127B-5317-4CE9-8022-264DDF38C128}"/>
+                <a16:creationId xmlns:a16="http://schemas.microsoft.com/office/drawing/2014/main" id="{B7DB55C3-23D6-46C0-AAA5-4E932543EE0A}"/>
               </a:ext>
             </a:extLst>
           </p:cNvPr>
@@ -2284,7 +2284,7 @@
           <p:cNvPr id="10" name="">
             <a:extLst xmlns:a="http://schemas.openxmlformats.org/drawingml/2006/main">
               <a:ext uri="{FF2B5EF4-FFF2-40B4-BE49-F238E27FC236}">
-                <a16:creationId xmlns:a16="http://schemas.microsoft.com/office/drawing/2014/main" id="{9A13F1C5-E840-461E-B285-8A365659DA27}"/>
+                <a16:creationId xmlns:a16="http://schemas.microsoft.com/office/drawing/2014/main" id="{4967892D-C836-474F-B9B3-E0E0F6BBB042}"/>
               </a:ext>
             </a:extLst>
           </p:cNvPr>
@@ -2341,7 +2341,7 @@
           <p:cNvPr id="11" name="">
             <a:extLst xmlns:a="http://schemas.openxmlformats.org/drawingml/2006/main">
               <a:ext uri="{FF2B5EF4-FFF2-40B4-BE49-F238E27FC236}">
-                <a16:creationId xmlns:a16="http://schemas.microsoft.com/office/drawing/2014/main" id="{AB16335B-76BE-4BFC-8151-9B3B21F43F7D}"/>
+                <a16:creationId xmlns:a16="http://schemas.microsoft.com/office/drawing/2014/main" id="{D1955D82-782B-4D83-AB09-6241ED138B98}"/>
               </a:ext>
             </a:extLst>
           </p:cNvPr>
@@ -2396,7 +2396,7 @@
     </p:spTree>
     <p:extLst>
       <p:ext uri="{BB962C8B-B14F-4D97-AF65-F5344CB8AC3E}">
-        <p14:creationId xmlns:p14="http://schemas.microsoft.com/office/powerpoint/2010/main" val="1207389770"/>
+        <p14:creationId xmlns:p14="http://schemas.microsoft.com/office/powerpoint/2010/main" val="243584337"/>
       </p:ext>
     </p:extLst>
   </p:cSld>
@@ -2427,7 +2427,7 @@
           <p:cNvPr id="14" name="">
             <a:extLst xmlns:a="http://schemas.openxmlformats.org/drawingml/2006/main">
               <a:ext uri="{FF2B5EF4-FFF2-40B4-BE49-F238E27FC236}">
-                <a16:creationId xmlns:a16="http://schemas.microsoft.com/office/drawing/2014/main" id="{9C43EE01-14CF-4202-A9CD-35A5C8D33091}"/>
+                <a16:creationId xmlns:a16="http://schemas.microsoft.com/office/drawing/2014/main" id="{2AD314DA-CDC0-416B-B6BB-E55CE8B704AA}"/>
               </a:ext>
             </a:extLst>
           </p:cNvPr>
@@ -2459,7 +2459,7 @@
           <p:cNvPr id="2" name="">
             <a:extLst xmlns:a="http://schemas.openxmlformats.org/drawingml/2006/main">
               <a:ext uri="{FF2B5EF4-FFF2-40B4-BE49-F238E27FC236}">
-                <a16:creationId xmlns:a16="http://schemas.microsoft.com/office/drawing/2014/main" id="{CB459B58-C0F7-4122-BC01-14D29CB3E8EA}"/>
+                <a16:creationId xmlns:a16="http://schemas.microsoft.com/office/drawing/2014/main" id="{7B39F6FD-A196-461C-9653-03618846C813}"/>
               </a:ext>
             </a:extLst>
           </p:cNvPr>
@@ -2516,7 +2516,7 @@
           <p:cNvPr id="3" name="">
             <a:extLst xmlns:a="http://schemas.openxmlformats.org/drawingml/2006/main">
               <a:ext uri="{FF2B5EF4-FFF2-40B4-BE49-F238E27FC236}">
-                <a16:creationId xmlns:a16="http://schemas.microsoft.com/office/drawing/2014/main" id="{04736A52-BD2E-4938-B4C3-B979EE628D2D}"/>
+                <a16:creationId xmlns:a16="http://schemas.microsoft.com/office/drawing/2014/main" id="{6494A8EA-1C20-4AF4-B020-99DAD17E5E9C}"/>
               </a:ext>
             </a:extLst>
           </p:cNvPr>
@@ -2548,7 +2548,7 @@
           <p:cNvPr id="4" name="">
             <a:extLst xmlns:a="http://schemas.openxmlformats.org/drawingml/2006/main">
               <a:ext uri="{FF2B5EF4-FFF2-40B4-BE49-F238E27FC236}">
-                <a16:creationId xmlns:a16="http://schemas.microsoft.com/office/drawing/2014/main" id="{01504A09-3CB1-4C08-BDAE-513B7DEF6DCD}"/>
+                <a16:creationId xmlns:a16="http://schemas.microsoft.com/office/drawing/2014/main" id="{211C9987-78DF-46BC-BF25-5AAD0FAF43FB}"/>
               </a:ext>
             </a:extLst>
           </p:cNvPr>
@@ -2605,7 +2605,7 @@
           <p:cNvPr id="5" name="">
             <a:extLst xmlns:a="http://schemas.openxmlformats.org/drawingml/2006/main">
               <a:ext uri="{FF2B5EF4-FFF2-40B4-BE49-F238E27FC236}">
-                <a16:creationId xmlns:a16="http://schemas.microsoft.com/office/drawing/2014/main" id="{B53106E9-9809-429B-9EEA-997E7F9A8F10}"/>
+                <a16:creationId xmlns:a16="http://schemas.microsoft.com/office/drawing/2014/main" id="{0081E31F-B94B-4EEB-AB69-C7B3AFF9E3A9}"/>
               </a:ext>
             </a:extLst>
           </p:cNvPr>
@@ -2662,7 +2662,7 @@
           <p:cNvPr id="6" name="">
             <a:extLst xmlns:a="http://schemas.openxmlformats.org/drawingml/2006/main">
               <a:ext uri="{FF2B5EF4-FFF2-40B4-BE49-F238E27FC236}">
-                <a16:creationId xmlns:a16="http://schemas.microsoft.com/office/drawing/2014/main" id="{D9465FE9-FAA2-43C5-A193-87B9DB86B03D}"/>
+                <a16:creationId xmlns:a16="http://schemas.microsoft.com/office/drawing/2014/main" id="{8AC882A0-7F96-48BB-A5BF-BA8BFF8B09FD}"/>
               </a:ext>
             </a:extLst>
           </p:cNvPr>
@@ -2719,7 +2719,7 @@
           <p:cNvPr id="7" name="">
             <a:extLst xmlns:a="http://schemas.openxmlformats.org/drawingml/2006/main">
               <a:ext uri="{FF2B5EF4-FFF2-40B4-BE49-F238E27FC236}">
-                <a16:creationId xmlns:a16="http://schemas.microsoft.com/office/drawing/2014/main" id="{0010BB5B-53C2-45F7-BE9B-78858FDB8ED1}"/>
+                <a16:creationId xmlns:a16="http://schemas.microsoft.com/office/drawing/2014/main" id="{83CABF5C-DFC1-42A7-A63E-59EAD817DE7F}"/>
               </a:ext>
             </a:extLst>
           </p:cNvPr>
@@ -2751,7 +2751,7 @@
           <p:cNvPr id="8" name="">
             <a:extLst xmlns:a="http://schemas.openxmlformats.org/drawingml/2006/main">
               <a:ext uri="{FF2B5EF4-FFF2-40B4-BE49-F238E27FC236}">
-                <a16:creationId xmlns:a16="http://schemas.microsoft.com/office/drawing/2014/main" id="{3E4358D4-8A6D-4EEA-B115-C31872FEF31C}"/>
+                <a16:creationId xmlns:a16="http://schemas.microsoft.com/office/drawing/2014/main" id="{8797BEEB-0308-4041-AB0B-C9B509217F53}"/>
               </a:ext>
             </a:extLst>
           </p:cNvPr>
@@ -2808,7 +2808,7 @@
           <p:cNvPr id="9" name="">
             <a:extLst xmlns:a="http://schemas.openxmlformats.org/drawingml/2006/main">
               <a:ext uri="{FF2B5EF4-FFF2-40B4-BE49-F238E27FC236}">
-                <a16:creationId xmlns:a16="http://schemas.microsoft.com/office/drawing/2014/main" id="{0AF8B3D2-5816-4B22-8BAE-9CDBEC766E54}"/>
+                <a16:creationId xmlns:a16="http://schemas.microsoft.com/office/drawing/2014/main" id="{F4820786-1DD6-404C-892F-399A56A9ED35}"/>
               </a:ext>
             </a:extLst>
           </p:cNvPr>
@@ -2865,7 +2865,7 @@
           <p:cNvPr id="10" name="">
             <a:extLst xmlns:a="http://schemas.openxmlformats.org/drawingml/2006/main">
               <a:ext uri="{FF2B5EF4-FFF2-40B4-BE49-F238E27FC236}">
-                <a16:creationId xmlns:a16="http://schemas.microsoft.com/office/drawing/2014/main" id="{F1C31B8B-72B3-4C0C-B341-086D75094A35}"/>
+                <a16:creationId xmlns:a16="http://schemas.microsoft.com/office/drawing/2014/main" id="{06F2C797-2A14-4713-B547-AF7B85C7115C}"/>
               </a:ext>
             </a:extLst>
           </p:cNvPr>
@@ -2922,7 +2922,7 @@
           <p:cNvPr id="11" name="">
             <a:extLst xmlns:a="http://schemas.openxmlformats.org/drawingml/2006/main">
               <a:ext uri="{FF2B5EF4-FFF2-40B4-BE49-F238E27FC236}">
-                <a16:creationId xmlns:a16="http://schemas.microsoft.com/office/drawing/2014/main" id="{BDE57CD5-3926-44AD-993D-7BA2E3459B70}"/>
+                <a16:creationId xmlns:a16="http://schemas.microsoft.com/office/drawing/2014/main" id="{152A395C-FC75-4C52-9655-D719175E6F87}"/>
               </a:ext>
             </a:extLst>
           </p:cNvPr>
@@ -2979,7 +2979,7 @@
           <p:cNvPr id="12" name="">
             <a:extLst xmlns:a="http://schemas.openxmlformats.org/drawingml/2006/main">
               <a:ext uri="{FF2B5EF4-FFF2-40B4-BE49-F238E27FC236}">
-                <a16:creationId xmlns:a16="http://schemas.microsoft.com/office/drawing/2014/main" id="{85869F51-6B2A-4D1E-B578-02EE3BEA3D05}"/>
+                <a16:creationId xmlns:a16="http://schemas.microsoft.com/office/drawing/2014/main" id="{6960C538-011E-45BA-A1ED-7134259F1203}"/>
               </a:ext>
             </a:extLst>
           </p:cNvPr>
@@ -3036,7 +3036,7 @@
           <p:cNvPr id="13" name="">
             <a:extLst xmlns:a="http://schemas.openxmlformats.org/drawingml/2006/main">
               <a:ext uri="{FF2B5EF4-FFF2-40B4-BE49-F238E27FC236}">
-                <a16:creationId xmlns:a16="http://schemas.microsoft.com/office/drawing/2014/main" id="{987150EE-5765-4B62-BADE-2EA38F2D7BD5}"/>
+                <a16:creationId xmlns:a16="http://schemas.microsoft.com/office/drawing/2014/main" id="{C8EC1F21-4AE6-43CC-93C5-F34D8AB3C17A}"/>
               </a:ext>
             </a:extLst>
           </p:cNvPr>
@@ -3091,7 +3091,7 @@
     </p:spTree>
     <p:extLst>
       <p:ext uri="{BB962C8B-B14F-4D97-AF65-F5344CB8AC3E}">
-        <p14:creationId xmlns:p14="http://schemas.microsoft.com/office/powerpoint/2010/main" val="1400931340"/>
+        <p14:creationId xmlns:p14="http://schemas.microsoft.com/office/powerpoint/2010/main" val="1065125228"/>
       </p:ext>
     </p:extLst>
   </p:cSld>
@@ -3292,7 +3292,7 @@
           <p:cNvPr id="19" name="">
             <a:extLst xmlns:a="http://schemas.openxmlformats.org/drawingml/2006/main">
               <a:ext uri="{FF2B5EF4-FFF2-40B4-BE49-F238E27FC236}">
-                <a16:creationId xmlns:a16="http://schemas.microsoft.com/office/drawing/2014/main" id="{E57DE6F0-2454-47F7-B1ED-E2477896B8FC}"/>
+                <a16:creationId xmlns:a16="http://schemas.microsoft.com/office/drawing/2014/main" id="{27FA0740-E20E-4176-94B4-FDAEC3BC6F17}"/>
               </a:ext>
             </a:extLst>
           </p:cNvPr>
@@ -3324,7 +3324,7 @@
           <p:cNvPr id="2" name="">
             <a:extLst xmlns:a="http://schemas.openxmlformats.org/drawingml/2006/main">
               <a:ext uri="{FF2B5EF4-FFF2-40B4-BE49-F238E27FC236}">
-                <a16:creationId xmlns:a16="http://schemas.microsoft.com/office/drawing/2014/main" id="{941BB187-BED2-4D0B-B583-5B1D0E98202F}"/>
+                <a16:creationId xmlns:a16="http://schemas.microsoft.com/office/drawing/2014/main" id="{94725A68-04E1-40CE-BB69-3145F7F7C9F7}"/>
               </a:ext>
             </a:extLst>
           </p:cNvPr>
@@ -3381,7 +3381,7 @@
           <p:cNvPr id="3" name="">
             <a:extLst xmlns:a="http://schemas.openxmlformats.org/drawingml/2006/main">
               <a:ext uri="{FF2B5EF4-FFF2-40B4-BE49-F238E27FC236}">
-                <a16:creationId xmlns:a16="http://schemas.microsoft.com/office/drawing/2014/main" id="{65063860-65A7-4756-A663-7C04443C5F1E}"/>
+                <a16:creationId xmlns:a16="http://schemas.microsoft.com/office/drawing/2014/main" id="{75116B65-4108-4ACB-A3BD-3CC49CFF5ED5}"/>
               </a:ext>
             </a:extLst>
           </p:cNvPr>
@@ -3413,7 +3413,7 @@
           <p:cNvPr id="4" name="">
             <a:extLst xmlns:a="http://schemas.openxmlformats.org/drawingml/2006/main">
               <a:ext uri="{FF2B5EF4-FFF2-40B4-BE49-F238E27FC236}">
-                <a16:creationId xmlns:a16="http://schemas.microsoft.com/office/drawing/2014/main" id="{8B20FA93-11F7-4104-9778-61C0D7280C1D}"/>
+                <a16:creationId xmlns:a16="http://schemas.microsoft.com/office/drawing/2014/main" id="{90C2272A-4E34-4F2D-81D3-9D45DFD341A1}"/>
               </a:ext>
             </a:extLst>
           </p:cNvPr>
@@ -3470,7 +3470,7 @@
           <p:cNvPr id="5" name="">
             <a:extLst xmlns:a="http://schemas.openxmlformats.org/drawingml/2006/main">
               <a:ext uri="{FF2B5EF4-FFF2-40B4-BE49-F238E27FC236}">
-                <a16:creationId xmlns:a16="http://schemas.microsoft.com/office/drawing/2014/main" id="{1DDC123D-EEF2-4B59-BEAA-C2B4708916FB}"/>
+                <a16:creationId xmlns:a16="http://schemas.microsoft.com/office/drawing/2014/main" id="{73CE9188-C1D4-4B7D-A786-F9954EB25697}"/>
               </a:ext>
             </a:extLst>
           </p:cNvPr>
@@ -3527,7 +3527,7 @@
           <p:cNvPr id="6" name="">
             <a:extLst xmlns:a="http://schemas.openxmlformats.org/drawingml/2006/main">
               <a:ext uri="{FF2B5EF4-FFF2-40B4-BE49-F238E27FC236}">
-                <a16:creationId xmlns:a16="http://schemas.microsoft.com/office/drawing/2014/main" id="{FB89B327-E4C7-4BB1-A409-5D53F8D8B8AB}"/>
+                <a16:creationId xmlns:a16="http://schemas.microsoft.com/office/drawing/2014/main" id="{DF518C07-2AB4-411B-A042-90E16DD3A140}"/>
               </a:ext>
             </a:extLst>
           </p:cNvPr>
@@ -3584,7 +3584,7 @@
           <p:cNvPr id="7" name="">
             <a:extLst xmlns:a="http://schemas.openxmlformats.org/drawingml/2006/main">
               <a:ext uri="{FF2B5EF4-FFF2-40B4-BE49-F238E27FC236}">
-                <a16:creationId xmlns:a16="http://schemas.microsoft.com/office/drawing/2014/main" id="{29181582-BB26-45B2-92BD-34C703EB0FB5}"/>
+                <a16:creationId xmlns:a16="http://schemas.microsoft.com/office/drawing/2014/main" id="{DD877A39-A38A-4E90-9C31-6052FC969D1D}"/>
               </a:ext>
             </a:extLst>
           </p:cNvPr>
@@ -3616,7 +3616,7 @@
           <p:cNvPr id="8" name="">
             <a:extLst xmlns:a="http://schemas.openxmlformats.org/drawingml/2006/main">
               <a:ext uri="{FF2B5EF4-FFF2-40B4-BE49-F238E27FC236}">
-                <a16:creationId xmlns:a16="http://schemas.microsoft.com/office/drawing/2014/main" id="{3F33C3E6-C15D-4B73-968B-40131FDDFB6A}"/>
+                <a16:creationId xmlns:a16="http://schemas.microsoft.com/office/drawing/2014/main" id="{62B3577D-FABF-4D5C-B1EB-2B2D297F3365}"/>
               </a:ext>
             </a:extLst>
           </p:cNvPr>
@@ -3673,7 +3673,7 @@
           <p:cNvPr id="9" name="">
             <a:extLst xmlns:a="http://schemas.openxmlformats.org/drawingml/2006/main">
               <a:ext uri="{FF2B5EF4-FFF2-40B4-BE49-F238E27FC236}">
-                <a16:creationId xmlns:a16="http://schemas.microsoft.com/office/drawing/2014/main" id="{8006BE15-0896-4EDA-8EE8-653AEB4CCE48}"/>
+                <a16:creationId xmlns:a16="http://schemas.microsoft.com/office/drawing/2014/main" id="{00055C37-E038-410B-8DB0-249E7BF0E16B}"/>
               </a:ext>
             </a:extLst>
           </p:cNvPr>
@@ -3730,7 +3730,7 @@
           <p:cNvPr id="10" name="">
             <a:extLst xmlns:a="http://schemas.openxmlformats.org/drawingml/2006/main">
               <a:ext uri="{FF2B5EF4-FFF2-40B4-BE49-F238E27FC236}">
-                <a16:creationId xmlns:a16="http://schemas.microsoft.com/office/drawing/2014/main" id="{60FD56C1-7373-476B-A450-64F41A4412C9}"/>
+                <a16:creationId xmlns:a16="http://schemas.microsoft.com/office/drawing/2014/main" id="{93FB0D5D-232F-4AA6-8886-DBE3CDD1EA42}"/>
               </a:ext>
             </a:extLst>
           </p:cNvPr>
@@ -3787,7 +3787,7 @@
           <p:cNvPr id="11" name="">
             <a:extLst xmlns:a="http://schemas.openxmlformats.org/drawingml/2006/main">
               <a:ext uri="{FF2B5EF4-FFF2-40B4-BE49-F238E27FC236}">
-                <a16:creationId xmlns:a16="http://schemas.microsoft.com/office/drawing/2014/main" id="{54C7B4CA-9532-44A0-853D-A892B97EEE01}"/>
+                <a16:creationId xmlns:a16="http://schemas.microsoft.com/office/drawing/2014/main" id="{9DF5D133-C31A-41A2-8730-EBFF144EA741}"/>
               </a:ext>
             </a:extLst>
           </p:cNvPr>
@@ -3821,7 +3821,7 @@
           <p:cNvPr id="12" name="">
             <a:extLst xmlns:a="http://schemas.openxmlformats.org/drawingml/2006/main">
               <a:ext uri="{FF2B5EF4-FFF2-40B4-BE49-F238E27FC236}">
-                <a16:creationId xmlns:a16="http://schemas.microsoft.com/office/drawing/2014/main" id="{E4E9C0F1-7F25-4493-A087-9C2F2CB03042}"/>
+                <a16:creationId xmlns:a16="http://schemas.microsoft.com/office/drawing/2014/main" id="{C3976DC8-9EDE-4EB6-BD9A-2BDAD4078B26}"/>
               </a:ext>
             </a:extLst>
           </p:cNvPr>
@@ -3878,7 +3878,7 @@
           <p:cNvPr id="13" name="">
             <a:extLst xmlns:a="http://schemas.openxmlformats.org/drawingml/2006/main">
               <a:ext uri="{FF2B5EF4-FFF2-40B4-BE49-F238E27FC236}">
-                <a16:creationId xmlns:a16="http://schemas.microsoft.com/office/drawing/2014/main" id="{8EFB43CE-6D8B-4A16-8966-E877200E591A}"/>
+                <a16:creationId xmlns:a16="http://schemas.microsoft.com/office/drawing/2014/main" id="{AEA764F5-B688-4135-9A19-A46A682AC487}"/>
               </a:ext>
             </a:extLst>
           </p:cNvPr>
@@ -3935,7 +3935,7 @@
           <p:cNvPr id="14" name="">
             <a:extLst xmlns:a="http://schemas.openxmlformats.org/drawingml/2006/main">
               <a:ext uri="{FF2B5EF4-FFF2-40B4-BE49-F238E27FC236}">
-                <a16:creationId xmlns:a16="http://schemas.microsoft.com/office/drawing/2014/main" id="{1F3C9F56-2723-4A45-9C6B-CCC1D577C22D}"/>
+                <a16:creationId xmlns:a16="http://schemas.microsoft.com/office/drawing/2014/main" id="{9F54856C-1527-40E5-B92B-027C5BCE1B78}"/>
               </a:ext>
             </a:extLst>
           </p:cNvPr>
@@ -3992,7 +3992,7 @@
           <p:cNvPr id="15" name="">
             <a:extLst xmlns:a="http://schemas.openxmlformats.org/drawingml/2006/main">
               <a:ext uri="{FF2B5EF4-FFF2-40B4-BE49-F238E27FC236}">
-                <a16:creationId xmlns:a16="http://schemas.microsoft.com/office/drawing/2014/main" id="{33C0E534-A5A2-464E-A9E0-10B41D187AAA}"/>
+                <a16:creationId xmlns:a16="http://schemas.microsoft.com/office/drawing/2014/main" id="{8DF558C0-942C-4BBD-8BCF-EC0DF9AB3F1D}"/>
               </a:ext>
             </a:extLst>
           </p:cNvPr>
@@ -4026,7 +4026,7 @@
           <p:cNvPr id="16" name="">
             <a:extLst xmlns:a="http://schemas.openxmlformats.org/drawingml/2006/main">
               <a:ext uri="{FF2B5EF4-FFF2-40B4-BE49-F238E27FC236}">
-                <a16:creationId xmlns:a16="http://schemas.microsoft.com/office/drawing/2014/main" id="{C829C8B1-75E9-4056-B26B-24B4042EA81F}"/>
+                <a16:creationId xmlns:a16="http://schemas.microsoft.com/office/drawing/2014/main" id="{D3B17AF7-33B3-4719-BB60-D7D08B63787C}"/>
               </a:ext>
             </a:extLst>
           </p:cNvPr>
@@ -4083,7 +4083,7 @@
           <p:cNvPr id="17" name="">
             <a:extLst xmlns:a="http://schemas.openxmlformats.org/drawingml/2006/main">
               <a:ext uri="{FF2B5EF4-FFF2-40B4-BE49-F238E27FC236}">
-                <a16:creationId xmlns:a16="http://schemas.microsoft.com/office/drawing/2014/main" id="{2432619E-DC35-41E4-A0CE-BE22C566B97B}"/>
+                <a16:creationId xmlns:a16="http://schemas.microsoft.com/office/drawing/2014/main" id="{DC3D447E-C7F8-4A78-AE72-36AE0C4938BB}"/>
               </a:ext>
             </a:extLst>
           </p:cNvPr>
@@ -4140,7 +4140,7 @@
           <p:cNvPr id="18" name="">
             <a:extLst xmlns:a="http://schemas.openxmlformats.org/drawingml/2006/main">
               <a:ext uri="{FF2B5EF4-FFF2-40B4-BE49-F238E27FC236}">
-                <a16:creationId xmlns:a16="http://schemas.microsoft.com/office/drawing/2014/main" id="{59E2379D-F6ED-4E51-BCF8-ED75F714A482}"/>
+                <a16:creationId xmlns:a16="http://schemas.microsoft.com/office/drawing/2014/main" id="{8D0757CB-9F27-4A6D-9619-60DCBCAB531D}"/>
               </a:ext>
             </a:extLst>
           </p:cNvPr>
@@ -4195,7 +4195,7 @@
     </p:spTree>
     <p:extLst>
       <p:ext uri="{BB962C8B-B14F-4D97-AF65-F5344CB8AC3E}">
-        <p14:creationId xmlns:p14="http://schemas.microsoft.com/office/powerpoint/2010/main" val="932840866"/>
+        <p14:creationId xmlns:p14="http://schemas.microsoft.com/office/powerpoint/2010/main" val="943563572"/>
       </p:ext>
     </p:extLst>
   </p:cSld>
@@ -4350,7 +4350,7 @@
           <p:cNvPr id="23" name="">
             <a:extLst xmlns:a="http://schemas.openxmlformats.org/drawingml/2006/main">
               <a:ext uri="{FF2B5EF4-FFF2-40B4-BE49-F238E27FC236}">
-                <a16:creationId xmlns:a16="http://schemas.microsoft.com/office/drawing/2014/main" id="{2AD32BC9-26CE-4562-9DE9-8E277F672828}"/>
+                <a16:creationId xmlns:a16="http://schemas.microsoft.com/office/drawing/2014/main" id="{F56DCA20-3950-4454-BD00-325465E8CEE7}"/>
               </a:ext>
             </a:extLst>
           </p:cNvPr>
@@ -4382,7 +4382,7 @@
           <p:cNvPr id="2" name="">
             <a:extLst xmlns:a="http://schemas.openxmlformats.org/drawingml/2006/main">
               <a:ext uri="{FF2B5EF4-FFF2-40B4-BE49-F238E27FC236}">
-                <a16:creationId xmlns:a16="http://schemas.microsoft.com/office/drawing/2014/main" id="{D6304678-5DAE-4256-8EEE-AE90A1F9CB6E}"/>
+                <a16:creationId xmlns:a16="http://schemas.microsoft.com/office/drawing/2014/main" id="{4AEFFA42-30C8-4678-8151-E004E38AAC9F}"/>
               </a:ext>
             </a:extLst>
           </p:cNvPr>
@@ -4439,7 +4439,7 @@
           <p:cNvPr id="3" name="">
             <a:extLst xmlns:a="http://schemas.openxmlformats.org/drawingml/2006/main">
               <a:ext uri="{FF2B5EF4-FFF2-40B4-BE49-F238E27FC236}">
-                <a16:creationId xmlns:a16="http://schemas.microsoft.com/office/drawing/2014/main" id="{435E1F7B-426F-40C3-806B-CC56F3F336F8}"/>
+                <a16:creationId xmlns:a16="http://schemas.microsoft.com/office/drawing/2014/main" id="{E775C39F-2950-42B6-BE59-C3C4410F300F}"/>
               </a:ext>
             </a:extLst>
           </p:cNvPr>
@@ -4471,7 +4471,7 @@
           <p:cNvPr id="4" name="">
             <a:extLst xmlns:a="http://schemas.openxmlformats.org/drawingml/2006/main">
               <a:ext uri="{FF2B5EF4-FFF2-40B4-BE49-F238E27FC236}">
-                <a16:creationId xmlns:a16="http://schemas.microsoft.com/office/drawing/2014/main" id="{F7F69128-DBC3-4554-A275-F1DFF8D28C93}"/>
+                <a16:creationId xmlns:a16="http://schemas.microsoft.com/office/drawing/2014/main" id="{3FF7D8ED-EB96-48E1-8000-2F80105FB4BD}"/>
               </a:ext>
             </a:extLst>
           </p:cNvPr>
@@ -4528,7 +4528,7 @@
           <p:cNvPr id="5" name="">
             <a:extLst xmlns:a="http://schemas.openxmlformats.org/drawingml/2006/main">
               <a:ext uri="{FF2B5EF4-FFF2-40B4-BE49-F238E27FC236}">
-                <a16:creationId xmlns:a16="http://schemas.microsoft.com/office/drawing/2014/main" id="{B1F7790D-0ACF-427A-ABB0-01C634D7D60C}"/>
+                <a16:creationId xmlns:a16="http://schemas.microsoft.com/office/drawing/2014/main" id="{C7A69D7F-AECD-45C9-B4E7-0BA139707358}"/>
               </a:ext>
             </a:extLst>
           </p:cNvPr>
@@ -4585,7 +4585,7 @@
           <p:cNvPr id="6" name="">
             <a:extLst xmlns:a="http://schemas.openxmlformats.org/drawingml/2006/main">
               <a:ext uri="{FF2B5EF4-FFF2-40B4-BE49-F238E27FC236}">
-                <a16:creationId xmlns:a16="http://schemas.microsoft.com/office/drawing/2014/main" id="{D2F93AEF-3E57-4EAE-9AF2-3D5925A00304}"/>
+                <a16:creationId xmlns:a16="http://schemas.microsoft.com/office/drawing/2014/main" id="{EDA5DF6A-0D64-49CD-9967-5D4F840EA434}"/>
               </a:ext>
             </a:extLst>
           </p:cNvPr>
@@ -4642,7 +4642,7 @@
           <p:cNvPr id="7" name="">
             <a:extLst xmlns:a="http://schemas.openxmlformats.org/drawingml/2006/main">
               <a:ext uri="{FF2B5EF4-FFF2-40B4-BE49-F238E27FC236}">
-                <a16:creationId xmlns:a16="http://schemas.microsoft.com/office/drawing/2014/main" id="{FEB3AF0B-813A-4CCF-BACC-8DE34E98DACD}"/>
+                <a16:creationId xmlns:a16="http://schemas.microsoft.com/office/drawing/2014/main" id="{46600069-3E62-42D9-AA9A-9D25A41F3921}"/>
               </a:ext>
             </a:extLst>
           </p:cNvPr>
@@ -4674,7 +4674,7 @@
           <p:cNvPr id="8" name="">
             <a:extLst xmlns:a="http://schemas.openxmlformats.org/drawingml/2006/main">
               <a:ext uri="{FF2B5EF4-FFF2-40B4-BE49-F238E27FC236}">
-                <a16:creationId xmlns:a16="http://schemas.microsoft.com/office/drawing/2014/main" id="{64266531-EA5A-4926-9315-303C398C2B5D}"/>
+                <a16:creationId xmlns:a16="http://schemas.microsoft.com/office/drawing/2014/main" id="{385EF1A1-392B-4017-8159-556F4167B075}"/>
               </a:ext>
             </a:extLst>
           </p:cNvPr>
@@ -4731,7 +4731,7 @@
           <p:cNvPr id="9" name="">
             <a:extLst xmlns:a="http://schemas.openxmlformats.org/drawingml/2006/main">
               <a:ext uri="{FF2B5EF4-FFF2-40B4-BE49-F238E27FC236}">
-                <a16:creationId xmlns:a16="http://schemas.microsoft.com/office/drawing/2014/main" id="{7EF986B1-B2F7-4D99-84EC-BE67CDE22E8D}"/>
+                <a16:creationId xmlns:a16="http://schemas.microsoft.com/office/drawing/2014/main" id="{BF7D21D9-4FDE-47E9-9BD6-26054682CC88}"/>
               </a:ext>
             </a:extLst>
           </p:cNvPr>
@@ -4788,7 +4788,7 @@
           <p:cNvPr id="10" name="">
             <a:extLst xmlns:a="http://schemas.openxmlformats.org/drawingml/2006/main">
               <a:ext uri="{FF2B5EF4-FFF2-40B4-BE49-F238E27FC236}">
-                <a16:creationId xmlns:a16="http://schemas.microsoft.com/office/drawing/2014/main" id="{3BFFE398-4C87-4D16-A4AC-A0DFA7DA87D0}"/>
+                <a16:creationId xmlns:a16="http://schemas.microsoft.com/office/drawing/2014/main" id="{75FD8FC7-A1E5-4ADD-AA52-1D72DE293E38}"/>
               </a:ext>
             </a:extLst>
           </p:cNvPr>
@@ -4822,7 +4822,7 @@
           <p:cNvPr id="11" name="">
             <a:extLst xmlns:a="http://schemas.openxmlformats.org/drawingml/2006/main">
               <a:ext uri="{FF2B5EF4-FFF2-40B4-BE49-F238E27FC236}">
-                <a16:creationId xmlns:a16="http://schemas.microsoft.com/office/drawing/2014/main" id="{2D81CDC6-4F83-400C-B3A5-CD93E109EDEB}"/>
+                <a16:creationId xmlns:a16="http://schemas.microsoft.com/office/drawing/2014/main" id="{98A87986-B49F-4BAD-940F-B826B6979C4A}"/>
               </a:ext>
             </a:extLst>
           </p:cNvPr>
@@ -4854,7 +4854,7 @@
           <p:cNvPr id="12" name="">
             <a:extLst xmlns:a="http://schemas.openxmlformats.org/drawingml/2006/main">
               <a:ext uri="{FF2B5EF4-FFF2-40B4-BE49-F238E27FC236}">
-                <a16:creationId xmlns:a16="http://schemas.microsoft.com/office/drawing/2014/main" id="{7D891090-5F6B-461B-83E5-D03DB94821B7}"/>
+                <a16:creationId xmlns:a16="http://schemas.microsoft.com/office/drawing/2014/main" id="{526C18DC-4C8A-4E27-B310-EBCFA1A3DB17}"/>
               </a:ext>
             </a:extLst>
           </p:cNvPr>
@@ -4911,7 +4911,7 @@
           <p:cNvPr id="13" name="">
             <a:extLst xmlns:a="http://schemas.openxmlformats.org/drawingml/2006/main">
               <a:ext uri="{FF2B5EF4-FFF2-40B4-BE49-F238E27FC236}">
-                <a16:creationId xmlns:a16="http://schemas.microsoft.com/office/drawing/2014/main" id="{00819F16-7369-4108-829C-E99276911630}"/>
+                <a16:creationId xmlns:a16="http://schemas.microsoft.com/office/drawing/2014/main" id="{54E94BF4-E8C2-496F-A9B6-8CBD4E243E79}"/>
               </a:ext>
             </a:extLst>
           </p:cNvPr>
@@ -4968,7 +4968,7 @@
           <p:cNvPr id="14" name="">
             <a:extLst xmlns:a="http://schemas.openxmlformats.org/drawingml/2006/main">
               <a:ext uri="{FF2B5EF4-FFF2-40B4-BE49-F238E27FC236}">
-                <a16:creationId xmlns:a16="http://schemas.microsoft.com/office/drawing/2014/main" id="{BE2D1D96-08BE-4526-96E5-AC1C62803A6C}"/>
+                <a16:creationId xmlns:a16="http://schemas.microsoft.com/office/drawing/2014/main" id="{87E99FAB-EC05-4436-8368-BC45F8D43306}"/>
               </a:ext>
             </a:extLst>
           </p:cNvPr>
@@ -5002,7 +5002,7 @@
           <p:cNvPr id="15" name="">
             <a:extLst xmlns:a="http://schemas.openxmlformats.org/drawingml/2006/main">
               <a:ext uri="{FF2B5EF4-FFF2-40B4-BE49-F238E27FC236}">
-                <a16:creationId xmlns:a16="http://schemas.microsoft.com/office/drawing/2014/main" id="{01145B55-8A42-49A0-8FC9-DEF89818CAB6}"/>
+                <a16:creationId xmlns:a16="http://schemas.microsoft.com/office/drawing/2014/main" id="{80185AA4-77D2-490B-8316-B2DF7B5BDF76}"/>
               </a:ext>
             </a:extLst>
           </p:cNvPr>
@@ -5034,7 +5034,7 @@
           <p:cNvPr id="16" name="">
             <a:extLst xmlns:a="http://schemas.openxmlformats.org/drawingml/2006/main">
               <a:ext uri="{FF2B5EF4-FFF2-40B4-BE49-F238E27FC236}">
-                <a16:creationId xmlns:a16="http://schemas.microsoft.com/office/drawing/2014/main" id="{4E6A9355-3E80-406F-BD3A-14F38190C977}"/>
+                <a16:creationId xmlns:a16="http://schemas.microsoft.com/office/drawing/2014/main" id="{08E2E9CE-9704-459A-8585-801358081BE9}"/>
               </a:ext>
             </a:extLst>
           </p:cNvPr>
@@ -5091,7 +5091,7 @@
           <p:cNvPr id="17" name="">
             <a:extLst xmlns:a="http://schemas.openxmlformats.org/drawingml/2006/main">
               <a:ext uri="{FF2B5EF4-FFF2-40B4-BE49-F238E27FC236}">
-                <a16:creationId xmlns:a16="http://schemas.microsoft.com/office/drawing/2014/main" id="{F8434E75-FE82-4DD1-A157-F50A30ECBF15}"/>
+                <a16:creationId xmlns:a16="http://schemas.microsoft.com/office/drawing/2014/main" id="{A0874BC0-52FF-4408-848E-A2F672E408C9}"/>
               </a:ext>
             </a:extLst>
           </p:cNvPr>
@@ -5148,7 +5148,7 @@
           <p:cNvPr id="18" name="">
             <a:extLst xmlns:a="http://schemas.openxmlformats.org/drawingml/2006/main">
               <a:ext uri="{FF2B5EF4-FFF2-40B4-BE49-F238E27FC236}">
-                <a16:creationId xmlns:a16="http://schemas.microsoft.com/office/drawing/2014/main" id="{B63C8571-F753-466D-9A9E-228572D8C511}"/>
+                <a16:creationId xmlns:a16="http://schemas.microsoft.com/office/drawing/2014/main" id="{5294779A-9A70-448E-A811-982AC89C080C}"/>
               </a:ext>
             </a:extLst>
           </p:cNvPr>
@@ -5182,7 +5182,7 @@
           <p:cNvPr id="19" name="">
             <a:extLst xmlns:a="http://schemas.openxmlformats.org/drawingml/2006/main">
               <a:ext uri="{FF2B5EF4-FFF2-40B4-BE49-F238E27FC236}">
-                <a16:creationId xmlns:a16="http://schemas.microsoft.com/office/drawing/2014/main" id="{5C2265FB-09BB-4753-9185-F0711322BAC7}"/>
+                <a16:creationId xmlns:a16="http://schemas.microsoft.com/office/drawing/2014/main" id="{06EB4B69-8121-47BB-8F87-368298348762}"/>
               </a:ext>
             </a:extLst>
           </p:cNvPr>
@@ -5214,7 +5214,7 @@
           <p:cNvPr id="20" name="">
             <a:extLst xmlns:a="http://schemas.openxmlformats.org/drawingml/2006/main">
               <a:ext uri="{FF2B5EF4-FFF2-40B4-BE49-F238E27FC236}">
-                <a16:creationId xmlns:a16="http://schemas.microsoft.com/office/drawing/2014/main" id="{585FB47B-8AF1-4A6E-8917-E2CF3F293549}"/>
+                <a16:creationId xmlns:a16="http://schemas.microsoft.com/office/drawing/2014/main" id="{02502223-9CFE-4297-968E-84A3B77FCBE9}"/>
               </a:ext>
             </a:extLst>
           </p:cNvPr>
@@ -5271,7 +5271,7 @@
           <p:cNvPr id="21" name="">
             <a:extLst xmlns:a="http://schemas.openxmlformats.org/drawingml/2006/main">
               <a:ext uri="{FF2B5EF4-FFF2-40B4-BE49-F238E27FC236}">
-                <a16:creationId xmlns:a16="http://schemas.microsoft.com/office/drawing/2014/main" id="{9E40EFA6-0134-4A95-AA28-D4A72F3E6059}"/>
+                <a16:creationId xmlns:a16="http://schemas.microsoft.com/office/drawing/2014/main" id="{9AF6C329-DC1B-4230-972B-102A72F3D261}"/>
               </a:ext>
             </a:extLst>
           </p:cNvPr>
@@ -5328,7 +5328,7 @@
           <p:cNvPr id="22" name="">
             <a:extLst xmlns:a="http://schemas.openxmlformats.org/drawingml/2006/main">
               <a:ext uri="{FF2B5EF4-FFF2-40B4-BE49-F238E27FC236}">
-                <a16:creationId xmlns:a16="http://schemas.microsoft.com/office/drawing/2014/main" id="{98886A68-B929-42F2-8578-0F61A52BCFA1}"/>
+                <a16:creationId xmlns:a16="http://schemas.microsoft.com/office/drawing/2014/main" id="{0274731B-86D4-4852-A221-6FBD3A07E9F8}"/>
               </a:ext>
             </a:extLst>
           </p:cNvPr>
@@ -5383,7 +5383,7 @@
     </p:spTree>
     <p:extLst>
       <p:ext uri="{BB962C8B-B14F-4D97-AF65-F5344CB8AC3E}">
-        <p14:creationId xmlns:p14="http://schemas.microsoft.com/office/powerpoint/2010/main" val="622117761"/>
+        <p14:creationId xmlns:p14="http://schemas.microsoft.com/office/powerpoint/2010/main" val="1158031236"/>
       </p:ext>
     </p:extLst>
   </p:cSld>
@@ -5584,7 +5584,7 @@
           <p:cNvPr id="23" name="">
             <a:extLst xmlns:a="http://schemas.openxmlformats.org/drawingml/2006/main">
               <a:ext uri="{FF2B5EF4-FFF2-40B4-BE49-F238E27FC236}">
-                <a16:creationId xmlns:a16="http://schemas.microsoft.com/office/drawing/2014/main" id="{FABB87CF-EBA3-4E18-A638-43963BB4812A}"/>
+                <a16:creationId xmlns:a16="http://schemas.microsoft.com/office/drawing/2014/main" id="{0A0F0D2B-2DC9-4A2F-844E-63F7F8D2E2D8}"/>
               </a:ext>
             </a:extLst>
           </p:cNvPr>
@@ -5616,7 +5616,7 @@
           <p:cNvPr id="2" name="">
             <a:extLst xmlns:a="http://schemas.openxmlformats.org/drawingml/2006/main">
               <a:ext uri="{FF2B5EF4-FFF2-40B4-BE49-F238E27FC236}">
-                <a16:creationId xmlns:a16="http://schemas.microsoft.com/office/drawing/2014/main" id="{253C5CF8-B4CB-4A73-9FE7-C3BBCDC78315}"/>
+                <a16:creationId xmlns:a16="http://schemas.microsoft.com/office/drawing/2014/main" id="{294FDB45-7AED-4833-9C90-3F04B3AD6150}"/>
               </a:ext>
             </a:extLst>
           </p:cNvPr>
@@ -5673,7 +5673,7 @@
           <p:cNvPr id="3" name="">
             <a:extLst xmlns:a="http://schemas.openxmlformats.org/drawingml/2006/main">
               <a:ext uri="{FF2B5EF4-FFF2-40B4-BE49-F238E27FC236}">
-                <a16:creationId xmlns:a16="http://schemas.microsoft.com/office/drawing/2014/main" id="{E03EEFD4-096D-400A-889F-82C235BA69F2}"/>
+                <a16:creationId xmlns:a16="http://schemas.microsoft.com/office/drawing/2014/main" id="{D050E54D-F0FC-49E9-AAF5-91BF880AF0A7}"/>
               </a:ext>
             </a:extLst>
           </p:cNvPr>
@@ -5705,7 +5705,7 @@
           <p:cNvPr id="4" name="">
             <a:extLst xmlns:a="http://schemas.openxmlformats.org/drawingml/2006/main">
               <a:ext uri="{FF2B5EF4-FFF2-40B4-BE49-F238E27FC236}">
-                <a16:creationId xmlns:a16="http://schemas.microsoft.com/office/drawing/2014/main" id="{9BCED3C6-483B-4DA6-90D1-DB8B20E20CC4}"/>
+                <a16:creationId xmlns:a16="http://schemas.microsoft.com/office/drawing/2014/main" id="{9EB17D85-CE81-4DD0-843C-9E9019EF3FFC}"/>
               </a:ext>
             </a:extLst>
           </p:cNvPr>
@@ -5762,7 +5762,7 @@
           <p:cNvPr id="5" name="">
             <a:extLst xmlns:a="http://schemas.openxmlformats.org/drawingml/2006/main">
               <a:ext uri="{FF2B5EF4-FFF2-40B4-BE49-F238E27FC236}">
-                <a16:creationId xmlns:a16="http://schemas.microsoft.com/office/drawing/2014/main" id="{B2E68D2C-B823-403F-94E9-9C76B2BAB28B}"/>
+                <a16:creationId xmlns:a16="http://schemas.microsoft.com/office/drawing/2014/main" id="{35D1BC04-7BED-4A4C-B973-E7FA4DB58C6E}"/>
               </a:ext>
             </a:extLst>
           </p:cNvPr>
@@ -5819,7 +5819,7 @@
           <p:cNvPr id="6" name="">
             <a:extLst xmlns:a="http://schemas.openxmlformats.org/drawingml/2006/main">
               <a:ext uri="{FF2B5EF4-FFF2-40B4-BE49-F238E27FC236}">
-                <a16:creationId xmlns:a16="http://schemas.microsoft.com/office/drawing/2014/main" id="{230FDCDD-E097-416F-B9AA-6928D6A0B538}"/>
+                <a16:creationId xmlns:a16="http://schemas.microsoft.com/office/drawing/2014/main" id="{2A0DC23D-4F3F-4A8A-8BAD-F2C96B2825A5}"/>
               </a:ext>
             </a:extLst>
           </p:cNvPr>
@@ -5876,7 +5876,7 @@
           <p:cNvPr id="7" name="">
             <a:extLst xmlns:a="http://schemas.openxmlformats.org/drawingml/2006/main">
               <a:ext uri="{FF2B5EF4-FFF2-40B4-BE49-F238E27FC236}">
-                <a16:creationId xmlns:a16="http://schemas.microsoft.com/office/drawing/2014/main" id="{E2FADCB8-A5E8-425D-A876-EBC8677A0FA1}"/>
+                <a16:creationId xmlns:a16="http://schemas.microsoft.com/office/drawing/2014/main" id="{81D8CD42-50AB-41D4-8E86-796671CEBF96}"/>
               </a:ext>
             </a:extLst>
           </p:cNvPr>
@@ -5908,7 +5908,7 @@
           <p:cNvPr id="8" name="">
             <a:extLst xmlns:a="http://schemas.openxmlformats.org/drawingml/2006/main">
               <a:ext uri="{FF2B5EF4-FFF2-40B4-BE49-F238E27FC236}">
-                <a16:creationId xmlns:a16="http://schemas.microsoft.com/office/drawing/2014/main" id="{5CF84B12-2911-497F-9574-272992A4F30B}"/>
+                <a16:creationId xmlns:a16="http://schemas.microsoft.com/office/drawing/2014/main" id="{5450CD24-9E85-4A03-9B0A-17656E81A780}"/>
               </a:ext>
             </a:extLst>
           </p:cNvPr>
@@ -5965,7 +5965,7 @@
           <p:cNvPr id="9" name="">
             <a:extLst xmlns:a="http://schemas.openxmlformats.org/drawingml/2006/main">
               <a:ext uri="{FF2B5EF4-FFF2-40B4-BE49-F238E27FC236}">
-                <a16:creationId xmlns:a16="http://schemas.microsoft.com/office/drawing/2014/main" id="{CB0B322E-EEF4-470B-87E9-ED552678C7FD}"/>
+                <a16:creationId xmlns:a16="http://schemas.microsoft.com/office/drawing/2014/main" id="{BDF4E38D-04D9-4CFB-8513-B4F958924DE5}"/>
               </a:ext>
             </a:extLst>
           </p:cNvPr>
@@ -6022,7 +6022,7 @@
           <p:cNvPr id="10" name="">
             <a:extLst xmlns:a="http://schemas.openxmlformats.org/drawingml/2006/main">
               <a:ext uri="{FF2B5EF4-FFF2-40B4-BE49-F238E27FC236}">
-                <a16:creationId xmlns:a16="http://schemas.microsoft.com/office/drawing/2014/main" id="{617B463E-E117-48A6-B814-D1DD1FD3D011}"/>
+                <a16:creationId xmlns:a16="http://schemas.microsoft.com/office/drawing/2014/main" id="{F3B3F5DE-F442-4281-AF1D-0B3146084CB2}"/>
               </a:ext>
             </a:extLst>
           </p:cNvPr>
@@ -6056,7 +6056,7 @@
           <p:cNvPr id="11" name="">
             <a:extLst xmlns:a="http://schemas.openxmlformats.org/drawingml/2006/main">
               <a:ext uri="{FF2B5EF4-FFF2-40B4-BE49-F238E27FC236}">
-                <a16:creationId xmlns:a16="http://schemas.microsoft.com/office/drawing/2014/main" id="{37F2B2BB-19F0-4DF6-9418-8E7C8C18CCB1}"/>
+                <a16:creationId xmlns:a16="http://schemas.microsoft.com/office/drawing/2014/main" id="{BFF470CD-62F5-4A5D-8CCD-BBECE33B0CBE}"/>
               </a:ext>
             </a:extLst>
           </p:cNvPr>
@@ -6088,7 +6088,7 @@
           <p:cNvPr id="12" name="">
             <a:extLst xmlns:a="http://schemas.openxmlformats.org/drawingml/2006/main">
               <a:ext uri="{FF2B5EF4-FFF2-40B4-BE49-F238E27FC236}">
-                <a16:creationId xmlns:a16="http://schemas.microsoft.com/office/drawing/2014/main" id="{21640B81-BC3D-4FDC-B550-1091388DAC5F}"/>
+                <a16:creationId xmlns:a16="http://schemas.microsoft.com/office/drawing/2014/main" id="{62080199-5599-4570-A83B-0E5A0A4358C0}"/>
               </a:ext>
             </a:extLst>
           </p:cNvPr>
@@ -6145,7 +6145,7 @@
           <p:cNvPr id="13" name="">
             <a:extLst xmlns:a="http://schemas.openxmlformats.org/drawingml/2006/main">
               <a:ext uri="{FF2B5EF4-FFF2-40B4-BE49-F238E27FC236}">
-                <a16:creationId xmlns:a16="http://schemas.microsoft.com/office/drawing/2014/main" id="{5F174923-ABD5-4BCE-AB9D-C78F6DB90DDD}"/>
+                <a16:creationId xmlns:a16="http://schemas.microsoft.com/office/drawing/2014/main" id="{E9DBAC17-7029-4DAB-B7A9-842C1653350F}"/>
               </a:ext>
             </a:extLst>
           </p:cNvPr>
@@ -6202,7 +6202,7 @@
           <p:cNvPr id="14" name="">
             <a:extLst xmlns:a="http://schemas.openxmlformats.org/drawingml/2006/main">
               <a:ext uri="{FF2B5EF4-FFF2-40B4-BE49-F238E27FC236}">
-                <a16:creationId xmlns:a16="http://schemas.microsoft.com/office/drawing/2014/main" id="{2B837916-159A-4CFA-B8E2-F5D41F330B78}"/>
+                <a16:creationId xmlns:a16="http://schemas.microsoft.com/office/drawing/2014/main" id="{60D7FB36-885A-4387-A199-DB6042B0673E}"/>
               </a:ext>
             </a:extLst>
           </p:cNvPr>
@@ -6236,7 +6236,7 @@
           <p:cNvPr id="15" name="">
             <a:extLst xmlns:a="http://schemas.openxmlformats.org/drawingml/2006/main">
               <a:ext uri="{FF2B5EF4-FFF2-40B4-BE49-F238E27FC236}">
-                <a16:creationId xmlns:a16="http://schemas.microsoft.com/office/drawing/2014/main" id="{2F5F432C-C42B-4EB1-A402-46929747EBAD}"/>
+                <a16:creationId xmlns:a16="http://schemas.microsoft.com/office/drawing/2014/main" id="{D1E8B644-339A-4132-BDDF-7B5BB72F4F8F}"/>
               </a:ext>
             </a:extLst>
           </p:cNvPr>
@@ -6268,7 +6268,7 @@
           <p:cNvPr id="16" name="">
             <a:extLst xmlns:a="http://schemas.openxmlformats.org/drawingml/2006/main">
               <a:ext uri="{FF2B5EF4-FFF2-40B4-BE49-F238E27FC236}">
-                <a16:creationId xmlns:a16="http://schemas.microsoft.com/office/drawing/2014/main" id="{3BC11408-3728-4E83-AAEB-7EC85A086E00}"/>
+                <a16:creationId xmlns:a16="http://schemas.microsoft.com/office/drawing/2014/main" id="{3F56537E-F05C-4A6B-9FF6-1619E5454AC1}"/>
               </a:ext>
             </a:extLst>
           </p:cNvPr>
@@ -6325,7 +6325,7 @@
           <p:cNvPr id="17" name="">
             <a:extLst xmlns:a="http://schemas.openxmlformats.org/drawingml/2006/main">
               <a:ext uri="{FF2B5EF4-FFF2-40B4-BE49-F238E27FC236}">
-                <a16:creationId xmlns:a16="http://schemas.microsoft.com/office/drawing/2014/main" id="{6642BCF3-90B6-48E7-9C15-5A3F9156D4C8}"/>
+                <a16:creationId xmlns:a16="http://schemas.microsoft.com/office/drawing/2014/main" id="{18662981-D423-449B-A617-92948F61A0B1}"/>
               </a:ext>
             </a:extLst>
           </p:cNvPr>
@@ -6382,7 +6382,7 @@
           <p:cNvPr id="18" name="">
             <a:extLst xmlns:a="http://schemas.openxmlformats.org/drawingml/2006/main">
               <a:ext uri="{FF2B5EF4-FFF2-40B4-BE49-F238E27FC236}">
-                <a16:creationId xmlns:a16="http://schemas.microsoft.com/office/drawing/2014/main" id="{467536B9-0A64-45D6-8D48-D6EE13F02704}"/>
+                <a16:creationId xmlns:a16="http://schemas.microsoft.com/office/drawing/2014/main" id="{F5556D67-BFBF-4469-8957-F845D684D2BF}"/>
               </a:ext>
             </a:extLst>
           </p:cNvPr>
@@ -6416,7 +6416,7 @@
           <p:cNvPr id="19" name="">
             <a:extLst xmlns:a="http://schemas.openxmlformats.org/drawingml/2006/main">
               <a:ext uri="{FF2B5EF4-FFF2-40B4-BE49-F238E27FC236}">
-                <a16:creationId xmlns:a16="http://schemas.microsoft.com/office/drawing/2014/main" id="{197A8DAD-42FB-43C2-8DB1-0C9EF2CC32DC}"/>
+                <a16:creationId xmlns:a16="http://schemas.microsoft.com/office/drawing/2014/main" id="{439F3C95-0B6B-4F5F-AE58-754B177B35B4}"/>
               </a:ext>
             </a:extLst>
           </p:cNvPr>
@@ -6448,7 +6448,7 @@
           <p:cNvPr id="20" name="">
             <a:extLst xmlns:a="http://schemas.openxmlformats.org/drawingml/2006/main">
               <a:ext uri="{FF2B5EF4-FFF2-40B4-BE49-F238E27FC236}">
-                <a16:creationId xmlns:a16="http://schemas.microsoft.com/office/drawing/2014/main" id="{58E20EFB-7F56-401D-89E2-41F3DA5208EC}"/>
+                <a16:creationId xmlns:a16="http://schemas.microsoft.com/office/drawing/2014/main" id="{B3A035F6-1DE7-4640-8FF6-8F468E3D742C}"/>
               </a:ext>
             </a:extLst>
           </p:cNvPr>
@@ -6505,7 +6505,7 @@
           <p:cNvPr id="21" name="">
             <a:extLst xmlns:a="http://schemas.openxmlformats.org/drawingml/2006/main">
               <a:ext uri="{FF2B5EF4-FFF2-40B4-BE49-F238E27FC236}">
-                <a16:creationId xmlns:a16="http://schemas.microsoft.com/office/drawing/2014/main" id="{A1DF7FCE-112C-4460-AD09-70FEA5AD60FD}"/>
+                <a16:creationId xmlns:a16="http://schemas.microsoft.com/office/drawing/2014/main" id="{EE4CD0C1-2213-42F1-9766-19391ACF9B1C}"/>
               </a:ext>
             </a:extLst>
           </p:cNvPr>
@@ -6562,7 +6562,7 @@
           <p:cNvPr id="22" name="">
             <a:extLst xmlns:a="http://schemas.openxmlformats.org/drawingml/2006/main">
               <a:ext uri="{FF2B5EF4-FFF2-40B4-BE49-F238E27FC236}">
-                <a16:creationId xmlns:a16="http://schemas.microsoft.com/office/drawing/2014/main" id="{078479CB-92AC-47E0-87D7-95BC39716139}"/>
+                <a16:creationId xmlns:a16="http://schemas.microsoft.com/office/drawing/2014/main" id="{831414C0-998B-4ABA-87FE-FC5AC3A28966}"/>
               </a:ext>
             </a:extLst>
           </p:cNvPr>
@@ -6617,7 +6617,7 @@
     </p:spTree>
     <p:extLst>
       <p:ext uri="{BB962C8B-B14F-4D97-AF65-F5344CB8AC3E}">
-        <p14:creationId xmlns:p14="http://schemas.microsoft.com/office/powerpoint/2010/main" val="423289884"/>
+        <p14:creationId xmlns:p14="http://schemas.microsoft.com/office/powerpoint/2010/main" val="404258362"/>
       </p:ext>
     </p:extLst>
   </p:cSld>
@@ -6818,7 +6818,7 @@
           <p:cNvPr id="16" name="">
             <a:extLst xmlns:a="http://schemas.openxmlformats.org/drawingml/2006/main">
               <a:ext uri="{FF2B5EF4-FFF2-40B4-BE49-F238E27FC236}">
-                <a16:creationId xmlns:a16="http://schemas.microsoft.com/office/drawing/2014/main" id="{EEDEBE5A-6671-43D1-B256-0D9DC63B5112}"/>
+                <a16:creationId xmlns:a16="http://schemas.microsoft.com/office/drawing/2014/main" id="{D001A91F-B293-4FE0-86CE-CAA0DDD1F1D7}"/>
               </a:ext>
             </a:extLst>
           </p:cNvPr>
@@ -6850,7 +6850,7 @@
           <p:cNvPr id="2" name="">
             <a:extLst xmlns:a="http://schemas.openxmlformats.org/drawingml/2006/main">
               <a:ext uri="{FF2B5EF4-FFF2-40B4-BE49-F238E27FC236}">
-                <a16:creationId xmlns:a16="http://schemas.microsoft.com/office/drawing/2014/main" id="{DCC490C9-EC58-4A48-AE59-0190F944B93F}"/>
+                <a16:creationId xmlns:a16="http://schemas.microsoft.com/office/drawing/2014/main" id="{34DC7940-2936-4965-813D-EC6412212CCE}"/>
               </a:ext>
             </a:extLst>
           </p:cNvPr>
@@ -6907,7 +6907,7 @@
           <p:cNvPr id="3" name="">
             <a:extLst xmlns:a="http://schemas.openxmlformats.org/drawingml/2006/main">
               <a:ext uri="{FF2B5EF4-FFF2-40B4-BE49-F238E27FC236}">
-                <a16:creationId xmlns:a16="http://schemas.microsoft.com/office/drawing/2014/main" id="{DE273F6E-9048-4597-9EC5-4DC60DDF5125}"/>
+                <a16:creationId xmlns:a16="http://schemas.microsoft.com/office/drawing/2014/main" id="{24DC73B4-A245-423E-B38B-A1D0C95549C4}"/>
               </a:ext>
             </a:extLst>
           </p:cNvPr>
@@ -6939,7 +6939,7 @@
           <p:cNvPr id="4" name="">
             <a:extLst xmlns:a="http://schemas.openxmlformats.org/drawingml/2006/main">
               <a:ext uri="{FF2B5EF4-FFF2-40B4-BE49-F238E27FC236}">
-                <a16:creationId xmlns:a16="http://schemas.microsoft.com/office/drawing/2014/main" id="{E7CD8DAC-B1A7-4FC3-BECC-BB1DC8A26827}"/>
+                <a16:creationId xmlns:a16="http://schemas.microsoft.com/office/drawing/2014/main" id="{E441D297-7630-4E24-A4C0-66393FDAE8F4}"/>
               </a:ext>
             </a:extLst>
           </p:cNvPr>
@@ -6996,7 +6996,7 @@
           <p:cNvPr id="5" name="">
             <a:extLst xmlns:a="http://schemas.openxmlformats.org/drawingml/2006/main">
               <a:ext uri="{FF2B5EF4-FFF2-40B4-BE49-F238E27FC236}">
-                <a16:creationId xmlns:a16="http://schemas.microsoft.com/office/drawing/2014/main" id="{7E43DB04-5E53-400C-A601-0288F9D5C8DE}"/>
+                <a16:creationId xmlns:a16="http://schemas.microsoft.com/office/drawing/2014/main" id="{A4278724-8C42-4C53-AD22-F9D1A8931884}"/>
               </a:ext>
             </a:extLst>
           </p:cNvPr>
@@ -7053,7 +7053,7 @@
           <p:cNvPr id="6" name="">
             <a:extLst xmlns:a="http://schemas.openxmlformats.org/drawingml/2006/main">
               <a:ext uri="{FF2B5EF4-FFF2-40B4-BE49-F238E27FC236}">
-                <a16:creationId xmlns:a16="http://schemas.microsoft.com/office/drawing/2014/main" id="{3CD163DF-7A8C-41D6-9B41-9BEFE42778D6}"/>
+                <a16:creationId xmlns:a16="http://schemas.microsoft.com/office/drawing/2014/main" id="{15FFE0BF-3069-4B99-8333-A306B4A5C095}"/>
               </a:ext>
             </a:extLst>
           </p:cNvPr>
@@ -7110,7 +7110,7 @@
           <p:cNvPr id="7" name="">
             <a:extLst xmlns:a="http://schemas.openxmlformats.org/drawingml/2006/main">
               <a:ext uri="{FF2B5EF4-FFF2-40B4-BE49-F238E27FC236}">
-                <a16:creationId xmlns:a16="http://schemas.microsoft.com/office/drawing/2014/main" id="{82918B4E-167C-40B9-B883-B19308F1869C}"/>
+                <a16:creationId xmlns:a16="http://schemas.microsoft.com/office/drawing/2014/main" id="{1E220C63-56D7-4F7C-A64A-35DBD6AAFC63}"/>
               </a:ext>
             </a:extLst>
           </p:cNvPr>
@@ -7142,7 +7142,7 @@
           <p:cNvPr id="8" name="">
             <a:extLst xmlns:a="http://schemas.openxmlformats.org/drawingml/2006/main">
               <a:ext uri="{FF2B5EF4-FFF2-40B4-BE49-F238E27FC236}">
-                <a16:creationId xmlns:a16="http://schemas.microsoft.com/office/drawing/2014/main" id="{8C1F3A98-C685-4165-AAF3-DA140094E760}"/>
+                <a16:creationId xmlns:a16="http://schemas.microsoft.com/office/drawing/2014/main" id="{5F618F1A-A260-4296-8F44-06AB75DDC2A6}"/>
               </a:ext>
             </a:extLst>
           </p:cNvPr>
@@ -7199,7 +7199,7 @@
           <p:cNvPr id="9" name="">
             <a:extLst xmlns:a="http://schemas.openxmlformats.org/drawingml/2006/main">
               <a:ext uri="{FF2B5EF4-FFF2-40B4-BE49-F238E27FC236}">
-                <a16:creationId xmlns:a16="http://schemas.microsoft.com/office/drawing/2014/main" id="{F3FC0311-E776-47BA-81CF-2AED57E556CA}"/>
+                <a16:creationId xmlns:a16="http://schemas.microsoft.com/office/drawing/2014/main" id="{4A05A691-00C7-440E-8BE8-7BE35153CC4F}"/>
               </a:ext>
             </a:extLst>
           </p:cNvPr>
@@ -7256,7 +7256,7 @@
           <p:cNvPr id="10" name="">
             <a:extLst xmlns:a="http://schemas.openxmlformats.org/drawingml/2006/main">
               <a:ext uri="{FF2B5EF4-FFF2-40B4-BE49-F238E27FC236}">
-                <a16:creationId xmlns:a16="http://schemas.microsoft.com/office/drawing/2014/main" id="{4221936A-E5DA-4117-A512-790E655CCBB4}"/>
+                <a16:creationId xmlns:a16="http://schemas.microsoft.com/office/drawing/2014/main" id="{A36D04FC-55EC-43AF-8CBA-CAD223644C83}"/>
               </a:ext>
             </a:extLst>
           </p:cNvPr>
@@ -7313,7 +7313,7 @@
           <p:cNvPr id="11" name="">
             <a:extLst xmlns:a="http://schemas.openxmlformats.org/drawingml/2006/main">
               <a:ext uri="{FF2B5EF4-FFF2-40B4-BE49-F238E27FC236}">
-                <a16:creationId xmlns:a16="http://schemas.microsoft.com/office/drawing/2014/main" id="{EBC3CBF1-E940-4BA5-9DD7-6A5ACDBF2B42}"/>
+                <a16:creationId xmlns:a16="http://schemas.microsoft.com/office/drawing/2014/main" id="{FC77883F-9269-48ED-8844-A6B634D19FB3}"/>
               </a:ext>
             </a:extLst>
           </p:cNvPr>
@@ -7345,7 +7345,7 @@
           <p:cNvPr id="12" name="">
             <a:extLst xmlns:a="http://schemas.openxmlformats.org/drawingml/2006/main">
               <a:ext uri="{FF2B5EF4-FFF2-40B4-BE49-F238E27FC236}">
-                <a16:creationId xmlns:a16="http://schemas.microsoft.com/office/drawing/2014/main" id="{1C1BB7A2-D096-4F27-B9D5-AFD23B1E3600}"/>
+                <a16:creationId xmlns:a16="http://schemas.microsoft.com/office/drawing/2014/main" id="{261FBED8-1447-4FDC-9773-35C09A694BBB}"/>
               </a:ext>
             </a:extLst>
           </p:cNvPr>
@@ -7402,7 +7402,7 @@
           <p:cNvPr id="13" name="">
             <a:extLst xmlns:a="http://schemas.openxmlformats.org/drawingml/2006/main">
               <a:ext uri="{FF2B5EF4-FFF2-40B4-BE49-F238E27FC236}">
-                <a16:creationId xmlns:a16="http://schemas.microsoft.com/office/drawing/2014/main" id="{2DC6690A-DAA7-4DC4-AB87-C11405B9150D}"/>
+                <a16:creationId xmlns:a16="http://schemas.microsoft.com/office/drawing/2014/main" id="{3783E07A-1130-483C-806D-A57ECF4BD376}"/>
               </a:ext>
             </a:extLst>
           </p:cNvPr>
@@ -7459,7 +7459,7 @@
           <p:cNvPr id="14" name="">
             <a:extLst xmlns:a="http://schemas.openxmlformats.org/drawingml/2006/main">
               <a:ext uri="{FF2B5EF4-FFF2-40B4-BE49-F238E27FC236}">
-                <a16:creationId xmlns:a16="http://schemas.microsoft.com/office/drawing/2014/main" id="{1DA2D39F-BC53-4435-8475-3C4953BCA019}"/>
+                <a16:creationId xmlns:a16="http://schemas.microsoft.com/office/drawing/2014/main" id="{677B23C1-470B-4473-8ED6-C5357A10E78D}"/>
               </a:ext>
             </a:extLst>
           </p:cNvPr>
@@ -7516,7 +7516,7 @@
           <p:cNvPr id="15" name="">
             <a:extLst xmlns:a="http://schemas.openxmlformats.org/drawingml/2006/main">
               <a:ext uri="{FF2B5EF4-FFF2-40B4-BE49-F238E27FC236}">
-                <a16:creationId xmlns:a16="http://schemas.microsoft.com/office/drawing/2014/main" id="{4BDF4CF8-AF93-408B-A606-5BA6F5FE4232}"/>
+                <a16:creationId xmlns:a16="http://schemas.microsoft.com/office/drawing/2014/main" id="{88BB85E5-96BB-4FD7-A276-7B1AE1172BB9}"/>
               </a:ext>
             </a:extLst>
           </p:cNvPr>
@@ -7571,7 +7571,7 @@
     </p:spTree>
     <p:extLst>
       <p:ext uri="{BB962C8B-B14F-4D97-AF65-F5344CB8AC3E}">
-        <p14:creationId xmlns:p14="http://schemas.microsoft.com/office/powerpoint/2010/main" val="1614654077"/>
+        <p14:creationId xmlns:p14="http://schemas.microsoft.com/office/powerpoint/2010/main" val="1994530752"/>
       </p:ext>
     </p:extLst>
   </p:cSld>
@@ -7772,7 +7772,7 @@
           <p:cNvPr id="23" name="">
             <a:extLst xmlns:a="http://schemas.openxmlformats.org/drawingml/2006/main">
               <a:ext uri="{FF2B5EF4-FFF2-40B4-BE49-F238E27FC236}">
-                <a16:creationId xmlns:a16="http://schemas.microsoft.com/office/drawing/2014/main" id="{D1FDBF20-D493-4B81-8719-0CA17482C9FF}"/>
+                <a16:creationId xmlns:a16="http://schemas.microsoft.com/office/drawing/2014/main" id="{856307B6-E41B-45F1-8512-62AEF0A7A30B}"/>
               </a:ext>
             </a:extLst>
           </p:cNvPr>
@@ -7804,7 +7804,7 @@
           <p:cNvPr id="2" name="">
             <a:extLst xmlns:a="http://schemas.openxmlformats.org/drawingml/2006/main">
               <a:ext uri="{FF2B5EF4-FFF2-40B4-BE49-F238E27FC236}">
-                <a16:creationId xmlns:a16="http://schemas.microsoft.com/office/drawing/2014/main" id="{5BFDA31F-48DA-4410-97F8-A96B3C52AE6D}"/>
+                <a16:creationId xmlns:a16="http://schemas.microsoft.com/office/drawing/2014/main" id="{A3C6EC0F-F2E9-447C-84F9-E87037470864}"/>
               </a:ext>
             </a:extLst>
           </p:cNvPr>
@@ -7861,7 +7861,7 @@
           <p:cNvPr id="3" name="">
             <a:extLst xmlns:a="http://schemas.openxmlformats.org/drawingml/2006/main">
               <a:ext uri="{FF2B5EF4-FFF2-40B4-BE49-F238E27FC236}">
-                <a16:creationId xmlns:a16="http://schemas.microsoft.com/office/drawing/2014/main" id="{03D68936-CC1F-4D27-AF18-2E9FBBF1CA4F}"/>
+                <a16:creationId xmlns:a16="http://schemas.microsoft.com/office/drawing/2014/main" id="{9597D1EC-0652-459A-A310-087621EAAC09}"/>
               </a:ext>
             </a:extLst>
           </p:cNvPr>
@@ -7893,7 +7893,7 @@
           <p:cNvPr id="4" name="">
             <a:extLst xmlns:a="http://schemas.openxmlformats.org/drawingml/2006/main">
               <a:ext uri="{FF2B5EF4-FFF2-40B4-BE49-F238E27FC236}">
-                <a16:creationId xmlns:a16="http://schemas.microsoft.com/office/drawing/2014/main" id="{40FAD2D8-3B12-458F-9A28-2EAE1555A256}"/>
+                <a16:creationId xmlns:a16="http://schemas.microsoft.com/office/drawing/2014/main" id="{3183336C-84DE-4B71-9CF1-0E144D894F09}"/>
               </a:ext>
             </a:extLst>
           </p:cNvPr>
@@ -7950,7 +7950,7 @@
           <p:cNvPr id="5" name="">
             <a:extLst xmlns:a="http://schemas.openxmlformats.org/drawingml/2006/main">
               <a:ext uri="{FF2B5EF4-FFF2-40B4-BE49-F238E27FC236}">
-                <a16:creationId xmlns:a16="http://schemas.microsoft.com/office/drawing/2014/main" id="{44F834CC-3126-42C3-B52B-CAE8519D29C1}"/>
+                <a16:creationId xmlns:a16="http://schemas.microsoft.com/office/drawing/2014/main" id="{432EB968-2ACC-4D54-9621-4B8EBBDE1568}"/>
               </a:ext>
             </a:extLst>
           </p:cNvPr>
@@ -8007,7 +8007,7 @@
           <p:cNvPr id="6" name="">
             <a:extLst xmlns:a="http://schemas.openxmlformats.org/drawingml/2006/main">
               <a:ext uri="{FF2B5EF4-FFF2-40B4-BE49-F238E27FC236}">
-                <a16:creationId xmlns:a16="http://schemas.microsoft.com/office/drawing/2014/main" id="{E3E58F4A-FDA8-4584-8266-789E60C9D04B}"/>
+                <a16:creationId xmlns:a16="http://schemas.microsoft.com/office/drawing/2014/main" id="{35E75E4D-9D82-4645-9BAB-0E0A2D78B319}"/>
               </a:ext>
             </a:extLst>
           </p:cNvPr>
@@ -8064,7 +8064,7 @@
           <p:cNvPr id="7" name="">
             <a:extLst xmlns:a="http://schemas.openxmlformats.org/drawingml/2006/main">
               <a:ext uri="{FF2B5EF4-FFF2-40B4-BE49-F238E27FC236}">
-                <a16:creationId xmlns:a16="http://schemas.microsoft.com/office/drawing/2014/main" id="{AE2BB801-CD8E-44EB-AE64-7A65B8F342D4}"/>
+                <a16:creationId xmlns:a16="http://schemas.microsoft.com/office/drawing/2014/main" id="{3797F5DA-7CEA-48A8-8EA6-2B6480746972}"/>
               </a:ext>
             </a:extLst>
           </p:cNvPr>
@@ -8096,7 +8096,7 @@
           <p:cNvPr id="8" name="">
             <a:extLst xmlns:a="http://schemas.openxmlformats.org/drawingml/2006/main">
               <a:ext uri="{FF2B5EF4-FFF2-40B4-BE49-F238E27FC236}">
-                <a16:creationId xmlns:a16="http://schemas.microsoft.com/office/drawing/2014/main" id="{721C47B6-1649-4887-8CCE-F60D48481EA1}"/>
+                <a16:creationId xmlns:a16="http://schemas.microsoft.com/office/drawing/2014/main" id="{5EFDFD76-A91B-4227-92AF-C46A12A4F04C}"/>
               </a:ext>
             </a:extLst>
           </p:cNvPr>
@@ -8153,7 +8153,7 @@
           <p:cNvPr id="9" name="">
             <a:extLst xmlns:a="http://schemas.openxmlformats.org/drawingml/2006/main">
               <a:ext uri="{FF2B5EF4-FFF2-40B4-BE49-F238E27FC236}">
-                <a16:creationId xmlns:a16="http://schemas.microsoft.com/office/drawing/2014/main" id="{3BE2CB51-0459-44DE-81D3-5BEAD16B543A}"/>
+                <a16:creationId xmlns:a16="http://schemas.microsoft.com/office/drawing/2014/main" id="{2265E3CC-61E1-456D-B047-8140FD1321B6}"/>
               </a:ext>
             </a:extLst>
           </p:cNvPr>
@@ -8210,19 +8210,19 @@
           <p:cNvPr id="10" name="">
             <a:extLst xmlns:a="http://schemas.openxmlformats.org/drawingml/2006/main">
               <a:ext uri="{FF2B5EF4-FFF2-40B4-BE49-F238E27FC236}">
-                <a16:creationId xmlns:a16="http://schemas.microsoft.com/office/drawing/2014/main" id="{3ECF8480-7D5B-445E-82AD-FEB64EB06195}"/>
-              </a:ext>
-            </a:extLst>
-          </p:cNvPr>
-          <p:cNvSpPr>
-            <a:spLocks xmlns:a="http://schemas.openxmlformats.org/drawingml/2006/main" noGrp="1"/>
-          </p:cNvSpPr>
-          <p:nvPr/>
-        </p:nvSpPr>
-        <p:spPr>
-          <a:xfrm xmlns:a="http://schemas.openxmlformats.org/drawingml/2006/main">
-            <a:off x="914400" y="1257300"/>
-            <a:ext cx="10363200" cy="781050"/>
+                <a16:creationId xmlns:a16="http://schemas.microsoft.com/office/drawing/2014/main" id="{BCF8294C-DCF2-4BD7-8956-C02374836A52}"/>
+              </a:ext>
+            </a:extLst>
+          </p:cNvPr>
+          <p:cNvSpPr>
+            <a:spLocks xmlns:a="http://schemas.openxmlformats.org/drawingml/2006/main" noGrp="1"/>
+          </p:cNvSpPr>
+          <p:nvPr/>
+        </p:nvSpPr>
+        <p:spPr>
+          <a:xfrm xmlns:a="http://schemas.openxmlformats.org/drawingml/2006/main">
+            <a:off x="857250" y="1219200"/>
+            <a:ext cx="10477500" cy="742950"/>
           </a:xfrm>
           <a:prstGeom xmlns:a="http://schemas.openxmlformats.org/drawingml/2006/main" prst="rect">
             <a:avLst/>
@@ -8239,7 +8239,7 @@
           <a:lstStyle xmlns:a="http://schemas.openxmlformats.org/drawingml/2006/main"/>
           <a:p xmlns:a="http://schemas.openxmlformats.org/drawingml/2006/main">
             <a:pPr algn="ctr">
-              <a:defRPr sz="2175" b="1">
+              <a:defRPr sz="2100" b="1">
                 <a:solidFill>
                   <a:srgbClr val="17253A"/>
                 </a:solidFill>
@@ -8249,7 +8249,7 @@
               </a:defRPr>
             </a:pPr>
             <a:r>
-              <a:rPr sz="2175" b="1">
+              <a:rPr sz="2100" b="1">
                 <a:solidFill>
                   <a:srgbClr val="17253A"/>
                 </a:solidFill>
@@ -8267,28 +8267,30 @@
           <p:cNvPr id="11" name="">
             <a:extLst xmlns:a="http://schemas.openxmlformats.org/drawingml/2006/main">
               <a:ext uri="{FF2B5EF4-FFF2-40B4-BE49-F238E27FC236}">
-                <a16:creationId xmlns:a16="http://schemas.microsoft.com/office/drawing/2014/main" id="{C4049A34-D645-41A3-8DB5-55C3FB9F1F5B}"/>
-              </a:ext>
-            </a:extLst>
-          </p:cNvPr>
-          <p:cNvSpPr>
-            <a:spLocks xmlns:a="http://schemas.openxmlformats.org/drawingml/2006/main" noGrp="1"/>
-          </p:cNvSpPr>
-          <p:nvPr/>
-        </p:nvSpPr>
-        <p:spPr>
-          <a:xfrm xmlns:a="http://schemas.openxmlformats.org/drawingml/2006/main">
-            <a:off x="1000125" y="2247900"/>
-            <a:ext cx="476250" cy="476250"/>
-          </a:xfrm>
-          <a:prstGeom xmlns:a="http://schemas.openxmlformats.org/drawingml/2006/main" prst="ellipse">
+                <a16:creationId xmlns:a16="http://schemas.microsoft.com/office/drawing/2014/main" id="{D6440D93-2ABC-4A1E-9B91-025C953F1C43}"/>
+              </a:ext>
+            </a:extLst>
+          </p:cNvPr>
+          <p:cNvSpPr>
+            <a:spLocks xmlns:a="http://schemas.openxmlformats.org/drawingml/2006/main" noGrp="1"/>
+          </p:cNvSpPr>
+          <p:nvPr/>
+        </p:nvSpPr>
+        <p:spPr>
+          <a:xfrm xmlns:a="http://schemas.openxmlformats.org/drawingml/2006/main">
+            <a:off x="971550" y="2124075"/>
+            <a:ext cx="38100" cy="3524250"/>
+          </a:xfrm>
+          <a:prstGeom xmlns:a="http://schemas.openxmlformats.org/drawingml/2006/main" prst="rect">
             <a:avLst/>
           </a:prstGeom>
           <a:solidFill xmlns:a="http://schemas.openxmlformats.org/drawingml/2006/main">
-            <a:srgbClr val="18324A"/>
+            <a:srgbClr val="2C6E73"/>
           </a:solidFill>
           <a:ln xmlns:a="http://schemas.openxmlformats.org/drawingml/2006/main" w="0">
-            <a:noFill/>
+            <a:solidFill>
+              <a:srgbClr val="2C6E73"/>
+            </a:solidFill>
           </a:ln>
         </p:spPr>
       </p:sp>
@@ -8297,19 +8299,19 @@
           <p:cNvPr id="12" name="">
             <a:extLst xmlns:a="http://schemas.openxmlformats.org/drawingml/2006/main">
               <a:ext uri="{FF2B5EF4-FFF2-40B4-BE49-F238E27FC236}">
-                <a16:creationId xmlns:a16="http://schemas.microsoft.com/office/drawing/2014/main" id="{F85C8A2C-169B-470B-BDAE-4FC39424F9D5}"/>
-              </a:ext>
-            </a:extLst>
-          </p:cNvPr>
-          <p:cNvSpPr>
-            <a:spLocks xmlns:a="http://schemas.openxmlformats.org/drawingml/2006/main" noGrp="1"/>
-          </p:cNvSpPr>
-          <p:nvPr/>
-        </p:nvSpPr>
-        <p:spPr>
-          <a:xfrm xmlns:a="http://schemas.openxmlformats.org/drawingml/2006/main">
-            <a:off x="1000125" y="2276475"/>
-            <a:ext cx="476250" cy="419100"/>
+                <a16:creationId xmlns:a16="http://schemas.microsoft.com/office/drawing/2014/main" id="{0B2E8FCB-FEAC-4001-A85D-E567FEA8E3C5}"/>
+              </a:ext>
+            </a:extLst>
+          </p:cNvPr>
+          <p:cNvSpPr>
+            <a:spLocks xmlns:a="http://schemas.openxmlformats.org/drawingml/2006/main" noGrp="1"/>
+          </p:cNvSpPr>
+          <p:nvPr/>
+        </p:nvSpPr>
+        <p:spPr>
+          <a:xfrm xmlns:a="http://schemas.openxmlformats.org/drawingml/2006/main">
+            <a:off x="1162050" y="2200275"/>
+            <a:ext cx="400050" cy="400050"/>
           </a:xfrm>
           <a:prstGeom xmlns:a="http://schemas.openxmlformats.org/drawingml/2006/main" prst="rect">
             <a:avLst/>
@@ -8326,9 +8328,9 @@
           <a:lstStyle xmlns:a="http://schemas.openxmlformats.org/drawingml/2006/main"/>
           <a:p xmlns:a="http://schemas.openxmlformats.org/drawingml/2006/main">
             <a:pPr algn="ctr">
-              <a:defRPr sz="1350" b="1">
-                <a:solidFill>
-                  <a:srgbClr val="FFFFFF"/>
+              <a:defRPr sz="1125" b="1">
+                <a:solidFill>
+                  <a:srgbClr val="2C6E73"/>
                 </a:solidFill>
                 <a:latin typeface="Arial"/>
                 <a:ea typeface="Arial"/>
@@ -8336,9 +8338,9 @@
               </a:defRPr>
             </a:pPr>
             <a:r>
-              <a:rPr sz="1350" b="1">
-                <a:solidFill>
-                  <a:srgbClr val="FFFFFF"/>
+              <a:rPr sz="1125" b="1">
+                <a:solidFill>
+                  <a:srgbClr val="2C6E73"/>
                 </a:solidFill>
                 <a:latin typeface="Arial"/>
                 <a:ea typeface="Arial"/>
@@ -8354,19 +8356,19 @@
           <p:cNvPr id="13" name="">
             <a:extLst xmlns:a="http://schemas.openxmlformats.org/drawingml/2006/main">
               <a:ext uri="{FF2B5EF4-FFF2-40B4-BE49-F238E27FC236}">
-                <a16:creationId xmlns:a16="http://schemas.microsoft.com/office/drawing/2014/main" id="{6B1A10FD-FF5B-4918-8497-79143661A29D}"/>
-              </a:ext>
-            </a:extLst>
-          </p:cNvPr>
-          <p:cNvSpPr>
-            <a:spLocks xmlns:a="http://schemas.openxmlformats.org/drawingml/2006/main" noGrp="1"/>
-          </p:cNvSpPr>
-          <p:nvPr/>
-        </p:nvSpPr>
-        <p:spPr>
-          <a:xfrm xmlns:a="http://schemas.openxmlformats.org/drawingml/2006/main">
-            <a:off x="1714500" y="2181225"/>
-            <a:ext cx="9429750" cy="609600"/>
+                <a16:creationId xmlns:a16="http://schemas.microsoft.com/office/drawing/2014/main" id="{5B27E485-5978-4C4B-A692-FE9D04DC8C26}"/>
+              </a:ext>
+            </a:extLst>
+          </p:cNvPr>
+          <p:cNvSpPr>
+            <a:spLocks xmlns:a="http://schemas.openxmlformats.org/drawingml/2006/main" noGrp="1"/>
+          </p:cNvSpPr>
+          <p:nvPr/>
+        </p:nvSpPr>
+        <p:spPr>
+          <a:xfrm xmlns:a="http://schemas.openxmlformats.org/drawingml/2006/main">
+            <a:off x="1714500" y="2114550"/>
+            <a:ext cx="9525000" cy="809625"/>
           </a:xfrm>
           <a:prstGeom xmlns:a="http://schemas.openxmlformats.org/drawingml/2006/main" prst="rect">
             <a:avLst/>
@@ -8383,7 +8385,7 @@
           <a:lstStyle xmlns:a="http://schemas.openxmlformats.org/drawingml/2006/main"/>
           <a:p xmlns:a="http://schemas.openxmlformats.org/drawingml/2006/main">
             <a:pPr algn="l">
-              <a:defRPr sz="1500" b="0">
+              <a:defRPr sz="1725" b="0">
                 <a:solidFill>
                   <a:srgbClr val="17253A"/>
                 </a:solidFill>
@@ -8393,7 +8395,7 @@
               </a:defRPr>
             </a:pPr>
             <a:r>
-              <a:rPr sz="1500" b="0">
+              <a:rPr sz="1725" b="0">
                 <a:solidFill>
                   <a:srgbClr val="17253A"/>
                 </a:solidFill>
@@ -8401,7 +8403,7 @@
                 <a:ea typeface="Arial"/>
                 <a:cs typeface="Arial"/>
               </a:rPr>
-              <a:t>Identify the structure: Write the conversion fact and identify whether the unit becomes larger or smaller.</a:t>
+              <a:t>845 mm</a:t>
             </a:r>
           </a:p>
         </p:txBody>
@@ -8411,28 +8413,30 @@
           <p:cNvPr id="14" name="">
             <a:extLst xmlns:a="http://schemas.openxmlformats.org/drawingml/2006/main">
               <a:ext uri="{FF2B5EF4-FFF2-40B4-BE49-F238E27FC236}">
-                <a16:creationId xmlns:a16="http://schemas.microsoft.com/office/drawing/2014/main" id="{333B6734-2C21-4498-B77E-56CA0438DE10}"/>
-              </a:ext>
-            </a:extLst>
-          </p:cNvPr>
-          <p:cNvSpPr>
-            <a:spLocks xmlns:a="http://schemas.openxmlformats.org/drawingml/2006/main" noGrp="1"/>
-          </p:cNvSpPr>
-          <p:nvPr/>
-        </p:nvSpPr>
-        <p:spPr>
-          <a:xfrm xmlns:a="http://schemas.openxmlformats.org/drawingml/2006/main">
-            <a:off x="1000125" y="2990850"/>
-            <a:ext cx="476250" cy="476250"/>
-          </a:xfrm>
-          <a:prstGeom xmlns:a="http://schemas.openxmlformats.org/drawingml/2006/main" prst="ellipse">
+                <a16:creationId xmlns:a16="http://schemas.microsoft.com/office/drawing/2014/main" id="{6FB167F3-CF98-4F71-A468-DC4929845C3F}"/>
+              </a:ext>
+            </a:extLst>
+          </p:cNvPr>
+          <p:cNvSpPr>
+            <a:spLocks xmlns:a="http://schemas.openxmlformats.org/drawingml/2006/main" noGrp="1"/>
+          </p:cNvSpPr>
+          <p:nvPr/>
+        </p:nvSpPr>
+        <p:spPr>
+          <a:xfrm xmlns:a="http://schemas.openxmlformats.org/drawingml/2006/main">
+            <a:off x="1714500" y="2943225"/>
+            <a:ext cx="9334500" cy="9525"/>
+          </a:xfrm>
+          <a:prstGeom xmlns:a="http://schemas.openxmlformats.org/drawingml/2006/main" prst="rect">
             <a:avLst/>
           </a:prstGeom>
           <a:solidFill xmlns:a="http://schemas.openxmlformats.org/drawingml/2006/main">
-            <a:srgbClr val="2C6E73"/>
+            <a:srgbClr val="D9E0E6"/>
           </a:solidFill>
           <a:ln xmlns:a="http://schemas.openxmlformats.org/drawingml/2006/main" w="0">
-            <a:noFill/>
+            <a:solidFill>
+              <a:srgbClr val="D9E0E6"/>
+            </a:solidFill>
           </a:ln>
         </p:spPr>
       </p:sp>
@@ -8441,19 +8445,19 @@
           <p:cNvPr id="15" name="">
             <a:extLst xmlns:a="http://schemas.openxmlformats.org/drawingml/2006/main">
               <a:ext uri="{FF2B5EF4-FFF2-40B4-BE49-F238E27FC236}">
-                <a16:creationId xmlns:a16="http://schemas.microsoft.com/office/drawing/2014/main" id="{2626BFC1-ABCF-4786-BFE2-197E785868C2}"/>
-              </a:ext>
-            </a:extLst>
-          </p:cNvPr>
-          <p:cNvSpPr>
-            <a:spLocks xmlns:a="http://schemas.openxmlformats.org/drawingml/2006/main" noGrp="1"/>
-          </p:cNvSpPr>
-          <p:nvPr/>
-        </p:nvSpPr>
-        <p:spPr>
-          <a:xfrm xmlns:a="http://schemas.openxmlformats.org/drawingml/2006/main">
-            <a:off x="1000125" y="3019425"/>
-            <a:ext cx="476250" cy="419100"/>
+                <a16:creationId xmlns:a16="http://schemas.microsoft.com/office/drawing/2014/main" id="{4904BDDD-9263-4DDE-ACA4-42B8397B8AA4}"/>
+              </a:ext>
+            </a:extLst>
+          </p:cNvPr>
+          <p:cNvSpPr>
+            <a:spLocks xmlns:a="http://schemas.openxmlformats.org/drawingml/2006/main" noGrp="1"/>
+          </p:cNvSpPr>
+          <p:nvPr/>
+        </p:nvSpPr>
+        <p:spPr>
+          <a:xfrm xmlns:a="http://schemas.openxmlformats.org/drawingml/2006/main">
+            <a:off x="1162050" y="3076575"/>
+            <a:ext cx="400050" cy="400050"/>
           </a:xfrm>
           <a:prstGeom xmlns:a="http://schemas.openxmlformats.org/drawingml/2006/main" prst="rect">
             <a:avLst/>
@@ -8470,9 +8474,9 @@
           <a:lstStyle xmlns:a="http://schemas.openxmlformats.org/drawingml/2006/main"/>
           <a:p xmlns:a="http://schemas.openxmlformats.org/drawingml/2006/main">
             <a:pPr algn="ctr">
-              <a:defRPr sz="1350" b="1">
-                <a:solidFill>
-                  <a:srgbClr val="FFFFFF"/>
+              <a:defRPr sz="1125" b="1">
+                <a:solidFill>
+                  <a:srgbClr val="2C6E73"/>
                 </a:solidFill>
                 <a:latin typeface="Arial"/>
                 <a:ea typeface="Arial"/>
@@ -8480,9 +8484,9 @@
               </a:defRPr>
             </a:pPr>
             <a:r>
-              <a:rPr sz="1350" b="1">
-                <a:solidFill>
-                  <a:srgbClr val="FFFFFF"/>
+              <a:rPr sz="1125" b="1">
+                <a:solidFill>
+                  <a:srgbClr val="2C6E73"/>
                 </a:solidFill>
                 <a:latin typeface="Arial"/>
                 <a:ea typeface="Arial"/>
@@ -8498,19 +8502,19 @@
           <p:cNvPr id="16" name="">
             <a:extLst xmlns:a="http://schemas.openxmlformats.org/drawingml/2006/main">
               <a:ext uri="{FF2B5EF4-FFF2-40B4-BE49-F238E27FC236}">
-                <a16:creationId xmlns:a16="http://schemas.microsoft.com/office/drawing/2014/main" id="{BEEDD83B-08A5-4531-A732-B1839B84F81B}"/>
-              </a:ext>
-            </a:extLst>
-          </p:cNvPr>
-          <p:cNvSpPr>
-            <a:spLocks xmlns:a="http://schemas.openxmlformats.org/drawingml/2006/main" noGrp="1"/>
-          </p:cNvSpPr>
-          <p:nvPr/>
-        </p:nvSpPr>
-        <p:spPr>
-          <a:xfrm xmlns:a="http://schemas.openxmlformats.org/drawingml/2006/main">
-            <a:off x="1714500" y="2924175"/>
-            <a:ext cx="9429750" cy="609600"/>
+                <a16:creationId xmlns:a16="http://schemas.microsoft.com/office/drawing/2014/main" id="{9B5C4F0E-9E17-4627-8B48-C834215E27E5}"/>
+              </a:ext>
+            </a:extLst>
+          </p:cNvPr>
+          <p:cNvSpPr>
+            <a:spLocks xmlns:a="http://schemas.openxmlformats.org/drawingml/2006/main" noGrp="1"/>
+          </p:cNvSpPr>
+          <p:nvPr/>
+        </p:nvSpPr>
+        <p:spPr>
+          <a:xfrm xmlns:a="http://schemas.openxmlformats.org/drawingml/2006/main">
+            <a:off x="1714500" y="2990850"/>
+            <a:ext cx="9525000" cy="809625"/>
           </a:xfrm>
           <a:prstGeom xmlns:a="http://schemas.openxmlformats.org/drawingml/2006/main" prst="rect">
             <a:avLst/>
@@ -8527,7 +8531,7 @@
           <a:lstStyle xmlns:a="http://schemas.openxmlformats.org/drawingml/2006/main"/>
           <a:p xmlns:a="http://schemas.openxmlformats.org/drawingml/2006/main">
             <a:pPr algn="l">
-              <a:defRPr sz="1500" b="0">
+              <a:defRPr sz="1725" b="0">
                 <a:solidFill>
                   <a:srgbClr val="17253A"/>
                 </a:solidFill>
@@ -8537,7 +8541,7 @@
               </a:defRPr>
             </a:pPr>
             <a:r>
-              <a:rPr sz="1500" b="0">
+              <a:rPr sz="1725" b="0">
                 <a:solidFill>
                   <a:srgbClr val="17253A"/>
                 </a:solidFill>
@@ -8545,7 +8549,7 @@
                 <a:ea typeface="Arial"/>
                 <a:cs typeface="Arial"/>
               </a:rPr>
-              <a:t>Set up the method: Multiply or divide by the correct scale factor.</a:t>
+              <a:t>1 m = 1,000 mm</a:t>
             </a:r>
           </a:p>
         </p:txBody>
@@ -8555,28 +8559,30 @@
           <p:cNvPr id="17" name="">
             <a:extLst xmlns:a="http://schemas.openxmlformats.org/drawingml/2006/main">
               <a:ext uri="{FF2B5EF4-FFF2-40B4-BE49-F238E27FC236}">
-                <a16:creationId xmlns:a16="http://schemas.microsoft.com/office/drawing/2014/main" id="{A052D798-84A0-49D3-8DB4-757B571CA28D}"/>
-              </a:ext>
-            </a:extLst>
-          </p:cNvPr>
-          <p:cNvSpPr>
-            <a:spLocks xmlns:a="http://schemas.openxmlformats.org/drawingml/2006/main" noGrp="1"/>
-          </p:cNvSpPr>
-          <p:nvPr/>
-        </p:nvSpPr>
-        <p:spPr>
-          <a:xfrm xmlns:a="http://schemas.openxmlformats.org/drawingml/2006/main">
-            <a:off x="1000125" y="3733800"/>
-            <a:ext cx="476250" cy="476250"/>
-          </a:xfrm>
-          <a:prstGeom xmlns:a="http://schemas.openxmlformats.org/drawingml/2006/main" prst="ellipse">
+                <a16:creationId xmlns:a16="http://schemas.microsoft.com/office/drawing/2014/main" id="{E902F988-EE53-431B-AA9D-CF371099EFAA}"/>
+              </a:ext>
+            </a:extLst>
+          </p:cNvPr>
+          <p:cNvSpPr>
+            <a:spLocks xmlns:a="http://schemas.openxmlformats.org/drawingml/2006/main" noGrp="1"/>
+          </p:cNvSpPr>
+          <p:nvPr/>
+        </p:nvSpPr>
+        <p:spPr>
+          <a:xfrm xmlns:a="http://schemas.openxmlformats.org/drawingml/2006/main">
+            <a:off x="1714500" y="3819525"/>
+            <a:ext cx="9334500" cy="9525"/>
+          </a:xfrm>
+          <a:prstGeom xmlns:a="http://schemas.openxmlformats.org/drawingml/2006/main" prst="rect">
             <a:avLst/>
           </a:prstGeom>
           <a:solidFill xmlns:a="http://schemas.openxmlformats.org/drawingml/2006/main">
-            <a:srgbClr val="2C6E73"/>
+            <a:srgbClr val="D9E0E6"/>
           </a:solidFill>
           <a:ln xmlns:a="http://schemas.openxmlformats.org/drawingml/2006/main" w="0">
-            <a:noFill/>
+            <a:solidFill>
+              <a:srgbClr val="D9E0E6"/>
+            </a:solidFill>
           </a:ln>
         </p:spPr>
       </p:sp>
@@ -8585,19 +8591,19 @@
           <p:cNvPr id="18" name="">
             <a:extLst xmlns:a="http://schemas.openxmlformats.org/drawingml/2006/main">
               <a:ext uri="{FF2B5EF4-FFF2-40B4-BE49-F238E27FC236}">
-                <a16:creationId xmlns:a16="http://schemas.microsoft.com/office/drawing/2014/main" id="{AF0C0F01-56AC-47D0-9B13-E14BD2CB0AEA}"/>
-              </a:ext>
-            </a:extLst>
-          </p:cNvPr>
-          <p:cNvSpPr>
-            <a:spLocks xmlns:a="http://schemas.openxmlformats.org/drawingml/2006/main" noGrp="1"/>
-          </p:cNvSpPr>
-          <p:nvPr/>
-        </p:nvSpPr>
-        <p:spPr>
-          <a:xfrm xmlns:a="http://schemas.openxmlformats.org/drawingml/2006/main">
-            <a:off x="1000125" y="3762375"/>
-            <a:ext cx="476250" cy="419100"/>
+                <a16:creationId xmlns:a16="http://schemas.microsoft.com/office/drawing/2014/main" id="{D6971AF6-165F-42D5-9D1F-41B4BA28F1FE}"/>
+              </a:ext>
+            </a:extLst>
+          </p:cNvPr>
+          <p:cNvSpPr>
+            <a:spLocks xmlns:a="http://schemas.openxmlformats.org/drawingml/2006/main" noGrp="1"/>
+          </p:cNvSpPr>
+          <p:nvPr/>
+        </p:nvSpPr>
+        <p:spPr>
+          <a:xfrm xmlns:a="http://schemas.openxmlformats.org/drawingml/2006/main">
+            <a:off x="1162050" y="3952875"/>
+            <a:ext cx="400050" cy="400050"/>
           </a:xfrm>
           <a:prstGeom xmlns:a="http://schemas.openxmlformats.org/drawingml/2006/main" prst="rect">
             <a:avLst/>
@@ -8614,9 +8620,9 @@
           <a:lstStyle xmlns:a="http://schemas.openxmlformats.org/drawingml/2006/main"/>
           <a:p xmlns:a="http://schemas.openxmlformats.org/drawingml/2006/main">
             <a:pPr algn="ctr">
-              <a:defRPr sz="1350" b="1">
-                <a:solidFill>
-                  <a:srgbClr val="FFFFFF"/>
+              <a:defRPr sz="1125" b="1">
+                <a:solidFill>
+                  <a:srgbClr val="2C6E73"/>
                 </a:solidFill>
                 <a:latin typeface="Arial"/>
                 <a:ea typeface="Arial"/>
@@ -8624,9 +8630,9 @@
               </a:defRPr>
             </a:pPr>
             <a:r>
-              <a:rPr sz="1350" b="1">
-                <a:solidFill>
-                  <a:srgbClr val="FFFFFF"/>
+              <a:rPr sz="1125" b="1">
+                <a:solidFill>
+                  <a:srgbClr val="2C6E73"/>
                 </a:solidFill>
                 <a:latin typeface="Arial"/>
                 <a:ea typeface="Arial"/>
@@ -8642,19 +8648,19 @@
           <p:cNvPr id="19" name="">
             <a:extLst xmlns:a="http://schemas.openxmlformats.org/drawingml/2006/main">
               <a:ext uri="{FF2B5EF4-FFF2-40B4-BE49-F238E27FC236}">
-                <a16:creationId xmlns:a16="http://schemas.microsoft.com/office/drawing/2014/main" id="{786EDD6D-C668-499E-9745-69D0E7B98C92}"/>
-              </a:ext>
-            </a:extLst>
-          </p:cNvPr>
-          <p:cNvSpPr>
-            <a:spLocks xmlns:a="http://schemas.openxmlformats.org/drawingml/2006/main" noGrp="1"/>
-          </p:cNvSpPr>
-          <p:nvPr/>
-        </p:nvSpPr>
-        <p:spPr>
-          <a:xfrm xmlns:a="http://schemas.openxmlformats.org/drawingml/2006/main">
-            <a:off x="1714500" y="3667125"/>
-            <a:ext cx="9429750" cy="609600"/>
+                <a16:creationId xmlns:a16="http://schemas.microsoft.com/office/drawing/2014/main" id="{484A0D67-2E9A-4A1F-AA24-B9047AB6344A}"/>
+              </a:ext>
+            </a:extLst>
+          </p:cNvPr>
+          <p:cNvSpPr>
+            <a:spLocks xmlns:a="http://schemas.openxmlformats.org/drawingml/2006/main" noGrp="1"/>
+          </p:cNvSpPr>
+          <p:nvPr/>
+        </p:nvSpPr>
+        <p:spPr>
+          <a:xfrm xmlns:a="http://schemas.openxmlformats.org/drawingml/2006/main">
+            <a:off x="1714500" y="3867150"/>
+            <a:ext cx="9525000" cy="809625"/>
           </a:xfrm>
           <a:prstGeom xmlns:a="http://schemas.openxmlformats.org/drawingml/2006/main" prst="rect">
             <a:avLst/>
@@ -8671,7 +8677,7 @@
           <a:lstStyle xmlns:a="http://schemas.openxmlformats.org/drawingml/2006/main"/>
           <a:p xmlns:a="http://schemas.openxmlformats.org/drawingml/2006/main">
             <a:pPr algn="l">
-              <a:defRPr sz="1500" b="0">
+              <a:defRPr sz="1725" b="0">
                 <a:solidFill>
                   <a:srgbClr val="17253A"/>
                 </a:solidFill>
@@ -8681,7 +8687,7 @@
               </a:defRPr>
             </a:pPr>
             <a:r>
-              <a:rPr sz="1500" b="0">
+              <a:rPr sz="1725" b="0">
                 <a:solidFill>
                   <a:srgbClr val="17253A"/>
                 </a:solidFill>
@@ -8689,7 +8695,7 @@
                 <a:ea typeface="Arial"/>
                 <a:cs typeface="Arial"/>
               </a:rPr>
-              <a:t>Complete the calculation: 0.845 m.</a:t>
+              <a:t>845 ÷ 1,000</a:t>
             </a:r>
           </a:p>
         </p:txBody>
@@ -8699,28 +8705,30 @@
           <p:cNvPr id="20" name="">
             <a:extLst xmlns:a="http://schemas.openxmlformats.org/drawingml/2006/main">
               <a:ext uri="{FF2B5EF4-FFF2-40B4-BE49-F238E27FC236}">
-                <a16:creationId xmlns:a16="http://schemas.microsoft.com/office/drawing/2014/main" id="{55C93A10-27A1-4350-B24E-2665625A123E}"/>
-              </a:ext>
-            </a:extLst>
-          </p:cNvPr>
-          <p:cNvSpPr>
-            <a:spLocks xmlns:a="http://schemas.openxmlformats.org/drawingml/2006/main" noGrp="1"/>
-          </p:cNvSpPr>
-          <p:nvPr/>
-        </p:nvSpPr>
-        <p:spPr>
-          <a:xfrm xmlns:a="http://schemas.openxmlformats.org/drawingml/2006/main">
-            <a:off x="1000125" y="4476750"/>
-            <a:ext cx="476250" cy="476250"/>
-          </a:xfrm>
-          <a:prstGeom xmlns:a="http://schemas.openxmlformats.org/drawingml/2006/main" prst="ellipse">
+                <a16:creationId xmlns:a16="http://schemas.microsoft.com/office/drawing/2014/main" id="{3EA53B01-0AC7-48F7-999C-AD9C635CAE7D}"/>
+              </a:ext>
+            </a:extLst>
+          </p:cNvPr>
+          <p:cNvSpPr>
+            <a:spLocks xmlns:a="http://schemas.openxmlformats.org/drawingml/2006/main" noGrp="1"/>
+          </p:cNvSpPr>
+          <p:nvPr/>
+        </p:nvSpPr>
+        <p:spPr>
+          <a:xfrm xmlns:a="http://schemas.openxmlformats.org/drawingml/2006/main">
+            <a:off x="1714500" y="4695825"/>
+            <a:ext cx="9334500" cy="9525"/>
+          </a:xfrm>
+          <a:prstGeom xmlns:a="http://schemas.openxmlformats.org/drawingml/2006/main" prst="rect">
             <a:avLst/>
           </a:prstGeom>
           <a:solidFill xmlns:a="http://schemas.openxmlformats.org/drawingml/2006/main">
-            <a:srgbClr val="2C6E73"/>
+            <a:srgbClr val="D9E0E6"/>
           </a:solidFill>
           <a:ln xmlns:a="http://schemas.openxmlformats.org/drawingml/2006/main" w="0">
-            <a:noFill/>
+            <a:solidFill>
+              <a:srgbClr val="D9E0E6"/>
+            </a:solidFill>
           </a:ln>
         </p:spPr>
       </p:sp>
@@ -8729,19 +8737,19 @@
           <p:cNvPr id="21" name="">
             <a:extLst xmlns:a="http://schemas.openxmlformats.org/drawingml/2006/main">
               <a:ext uri="{FF2B5EF4-FFF2-40B4-BE49-F238E27FC236}">
-                <a16:creationId xmlns:a16="http://schemas.microsoft.com/office/drawing/2014/main" id="{79F1B952-2BCB-4D67-B1FD-BBF019990694}"/>
-              </a:ext>
-            </a:extLst>
-          </p:cNvPr>
-          <p:cNvSpPr>
-            <a:spLocks xmlns:a="http://schemas.openxmlformats.org/drawingml/2006/main" noGrp="1"/>
-          </p:cNvSpPr>
-          <p:nvPr/>
-        </p:nvSpPr>
-        <p:spPr>
-          <a:xfrm xmlns:a="http://schemas.openxmlformats.org/drawingml/2006/main">
-            <a:off x="1000125" y="4505325"/>
-            <a:ext cx="476250" cy="419100"/>
+                <a16:creationId xmlns:a16="http://schemas.microsoft.com/office/drawing/2014/main" id="{1D1B4C34-0127-4BF4-86EA-944451500DB8}"/>
+              </a:ext>
+            </a:extLst>
+          </p:cNvPr>
+          <p:cNvSpPr>
+            <a:spLocks xmlns:a="http://schemas.openxmlformats.org/drawingml/2006/main" noGrp="1"/>
+          </p:cNvSpPr>
+          <p:nvPr/>
+        </p:nvSpPr>
+        <p:spPr>
+          <a:xfrm xmlns:a="http://schemas.openxmlformats.org/drawingml/2006/main">
+            <a:off x="1162050" y="4829175"/>
+            <a:ext cx="400050" cy="400050"/>
           </a:xfrm>
           <a:prstGeom xmlns:a="http://schemas.openxmlformats.org/drawingml/2006/main" prst="rect">
             <a:avLst/>
@@ -8758,9 +8766,9 @@
           <a:lstStyle xmlns:a="http://schemas.openxmlformats.org/drawingml/2006/main"/>
           <a:p xmlns:a="http://schemas.openxmlformats.org/drawingml/2006/main">
             <a:pPr algn="ctr">
-              <a:defRPr sz="1350" b="1">
-                <a:solidFill>
-                  <a:srgbClr val="FFFFFF"/>
+              <a:defRPr sz="1125" b="1">
+                <a:solidFill>
+                  <a:srgbClr val="2F785D"/>
                 </a:solidFill>
                 <a:latin typeface="Arial"/>
                 <a:ea typeface="Arial"/>
@@ -8768,9 +8776,9 @@
               </a:defRPr>
             </a:pPr>
             <a:r>
-              <a:rPr sz="1350" b="1">
-                <a:solidFill>
-                  <a:srgbClr val="FFFFFF"/>
+              <a:rPr sz="1125" b="1">
+                <a:solidFill>
+                  <a:srgbClr val="2F785D"/>
                 </a:solidFill>
                 <a:latin typeface="Arial"/>
                 <a:ea typeface="Arial"/>
@@ -8786,19 +8794,19 @@
           <p:cNvPr id="22" name="">
             <a:extLst xmlns:a="http://schemas.openxmlformats.org/drawingml/2006/main">
               <a:ext uri="{FF2B5EF4-FFF2-40B4-BE49-F238E27FC236}">
-                <a16:creationId xmlns:a16="http://schemas.microsoft.com/office/drawing/2014/main" id="{F46CD94F-95E7-49B2-8F64-350C921BE48E}"/>
-              </a:ext>
-            </a:extLst>
-          </p:cNvPr>
-          <p:cNvSpPr>
-            <a:spLocks xmlns:a="http://schemas.openxmlformats.org/drawingml/2006/main" noGrp="1"/>
-          </p:cNvSpPr>
-          <p:nvPr/>
-        </p:nvSpPr>
-        <p:spPr>
-          <a:xfrm xmlns:a="http://schemas.openxmlformats.org/drawingml/2006/main">
-            <a:off x="1714500" y="4410075"/>
-            <a:ext cx="9429750" cy="609600"/>
+                <a16:creationId xmlns:a16="http://schemas.microsoft.com/office/drawing/2014/main" id="{3EBC625F-DF81-41CC-9736-9F5B3436184E}"/>
+              </a:ext>
+            </a:extLst>
+          </p:cNvPr>
+          <p:cNvSpPr>
+            <a:spLocks xmlns:a="http://schemas.openxmlformats.org/drawingml/2006/main" noGrp="1"/>
+          </p:cNvSpPr>
+          <p:nvPr/>
+        </p:nvSpPr>
+        <p:spPr>
+          <a:xfrm xmlns:a="http://schemas.openxmlformats.org/drawingml/2006/main">
+            <a:off x="1714500" y="4743450"/>
+            <a:ext cx="9525000" cy="809625"/>
           </a:xfrm>
           <a:prstGeom xmlns:a="http://schemas.openxmlformats.org/drawingml/2006/main" prst="rect">
             <a:avLst/>
@@ -8815,7 +8823,7 @@
           <a:lstStyle xmlns:a="http://schemas.openxmlformats.org/drawingml/2006/main"/>
           <a:p xmlns:a="http://schemas.openxmlformats.org/drawingml/2006/main">
             <a:pPr algn="l">
-              <a:defRPr sz="1500" b="1">
+              <a:defRPr sz="1725" b="1">
                 <a:solidFill>
                   <a:srgbClr val="2F785D"/>
                 </a:solidFill>
@@ -8825,7 +8833,7 @@
               </a:defRPr>
             </a:pPr>
             <a:r>
-              <a:rPr sz="1500" b="1">
+              <a:rPr sz="1725" b="1">
                 <a:solidFill>
                   <a:srgbClr val="2F785D"/>
                 </a:solidFill>
@@ -8833,7 +8841,7 @@
                 <a:ea typeface="Arial"/>
                 <a:cs typeface="Arial"/>
               </a:rPr>
-              <a:t>Check the result: Attach the unit and check the answer's size in context.</a:t>
+              <a:t>0.845 m</a:t>
             </a:r>
           </a:p>
         </p:txBody>
@@ -8841,7 +8849,7 @@
     </p:spTree>
     <p:extLst>
       <p:ext uri="{BB962C8B-B14F-4D97-AF65-F5344CB8AC3E}">
-        <p14:creationId xmlns:p14="http://schemas.microsoft.com/office/powerpoint/2010/main" val="1787861798"/>
+        <p14:creationId xmlns:p14="http://schemas.microsoft.com/office/powerpoint/2010/main" val="371800049"/>
       </p:ext>
     </p:extLst>
   </p:cSld>
@@ -9134,7 +9142,7 @@
           <p:cNvPr id="15" name="">
             <a:extLst xmlns:a="http://schemas.openxmlformats.org/drawingml/2006/main">
               <a:ext uri="{FF2B5EF4-FFF2-40B4-BE49-F238E27FC236}">
-                <a16:creationId xmlns:a16="http://schemas.microsoft.com/office/drawing/2014/main" id="{80BD00A9-6D77-459F-8DB5-1208BEE1C16F}"/>
+                <a16:creationId xmlns:a16="http://schemas.microsoft.com/office/drawing/2014/main" id="{3D17E6DE-7060-454D-A627-5C5AB0387CBB}"/>
               </a:ext>
             </a:extLst>
           </p:cNvPr>
@@ -9166,7 +9174,7 @@
           <p:cNvPr id="2" name="">
             <a:extLst xmlns:a="http://schemas.openxmlformats.org/drawingml/2006/main">
               <a:ext uri="{FF2B5EF4-FFF2-40B4-BE49-F238E27FC236}">
-                <a16:creationId xmlns:a16="http://schemas.microsoft.com/office/drawing/2014/main" id="{3E0E808E-956F-4F64-8721-DE31F0C84D4A}"/>
+                <a16:creationId xmlns:a16="http://schemas.microsoft.com/office/drawing/2014/main" id="{A138DDF2-8BEF-433E-9D21-C4B49AA44B84}"/>
               </a:ext>
             </a:extLst>
           </p:cNvPr>
@@ -9223,7 +9231,7 @@
           <p:cNvPr id="3" name="">
             <a:extLst xmlns:a="http://schemas.openxmlformats.org/drawingml/2006/main">
               <a:ext uri="{FF2B5EF4-FFF2-40B4-BE49-F238E27FC236}">
-                <a16:creationId xmlns:a16="http://schemas.microsoft.com/office/drawing/2014/main" id="{621DDB0D-242F-43FD-B78F-853B14559DC2}"/>
+                <a16:creationId xmlns:a16="http://schemas.microsoft.com/office/drawing/2014/main" id="{A0DC8535-A54B-4D7C-87F4-B14A72F3F2C4}"/>
               </a:ext>
             </a:extLst>
           </p:cNvPr>
@@ -9255,7 +9263,7 @@
           <p:cNvPr id="4" name="">
             <a:extLst xmlns:a="http://schemas.openxmlformats.org/drawingml/2006/main">
               <a:ext uri="{FF2B5EF4-FFF2-40B4-BE49-F238E27FC236}">
-                <a16:creationId xmlns:a16="http://schemas.microsoft.com/office/drawing/2014/main" id="{C4BCA296-155E-4604-AE06-52C22C599634}"/>
+                <a16:creationId xmlns:a16="http://schemas.microsoft.com/office/drawing/2014/main" id="{40E5BEC1-626E-4EE4-A444-24EB83B0772C}"/>
               </a:ext>
             </a:extLst>
           </p:cNvPr>
@@ -9312,7 +9320,7 @@
           <p:cNvPr id="5" name="">
             <a:extLst xmlns:a="http://schemas.openxmlformats.org/drawingml/2006/main">
               <a:ext uri="{FF2B5EF4-FFF2-40B4-BE49-F238E27FC236}">
-                <a16:creationId xmlns:a16="http://schemas.microsoft.com/office/drawing/2014/main" id="{A05C38A1-5439-4EC0-B34E-F0D1957304FF}"/>
+                <a16:creationId xmlns:a16="http://schemas.microsoft.com/office/drawing/2014/main" id="{2D69AB7D-6003-4D28-8D37-D692CECF5C7E}"/>
               </a:ext>
             </a:extLst>
           </p:cNvPr>
@@ -9369,7 +9377,7 @@
           <p:cNvPr id="6" name="">
             <a:extLst xmlns:a="http://schemas.openxmlformats.org/drawingml/2006/main">
               <a:ext uri="{FF2B5EF4-FFF2-40B4-BE49-F238E27FC236}">
-                <a16:creationId xmlns:a16="http://schemas.microsoft.com/office/drawing/2014/main" id="{7CE7DBCF-E468-451B-A9CE-DFD11C29CE2E}"/>
+                <a16:creationId xmlns:a16="http://schemas.microsoft.com/office/drawing/2014/main" id="{B7B215EF-34B1-46FF-855D-B6DD2AB080E1}"/>
               </a:ext>
             </a:extLst>
           </p:cNvPr>
@@ -9426,7 +9434,7 @@
           <p:cNvPr id="7" name="">
             <a:extLst xmlns:a="http://schemas.openxmlformats.org/drawingml/2006/main">
               <a:ext uri="{FF2B5EF4-FFF2-40B4-BE49-F238E27FC236}">
-                <a16:creationId xmlns:a16="http://schemas.microsoft.com/office/drawing/2014/main" id="{88A383B9-C5DB-4C5F-99EA-EC78CE418AA1}"/>
+                <a16:creationId xmlns:a16="http://schemas.microsoft.com/office/drawing/2014/main" id="{E54DA768-44CC-49B9-B8C3-0F5A5444C829}"/>
               </a:ext>
             </a:extLst>
           </p:cNvPr>
@@ -9458,7 +9466,7 @@
           <p:cNvPr id="8" name="">
             <a:extLst xmlns:a="http://schemas.openxmlformats.org/drawingml/2006/main">
               <a:ext uri="{FF2B5EF4-FFF2-40B4-BE49-F238E27FC236}">
-                <a16:creationId xmlns:a16="http://schemas.microsoft.com/office/drawing/2014/main" id="{20C5C2D9-77E2-4E05-8A65-DEE80F3E491B}"/>
+                <a16:creationId xmlns:a16="http://schemas.microsoft.com/office/drawing/2014/main" id="{0346882F-3B08-44D9-92C2-F58B440576EE}"/>
               </a:ext>
             </a:extLst>
           </p:cNvPr>
@@ -9515,7 +9523,7 @@
           <p:cNvPr id="9" name="">
             <a:extLst xmlns:a="http://schemas.openxmlformats.org/drawingml/2006/main">
               <a:ext uri="{FF2B5EF4-FFF2-40B4-BE49-F238E27FC236}">
-                <a16:creationId xmlns:a16="http://schemas.microsoft.com/office/drawing/2014/main" id="{10E811C3-FD5F-4AD6-AD6C-67841901A330}"/>
+                <a16:creationId xmlns:a16="http://schemas.microsoft.com/office/drawing/2014/main" id="{CB4907EC-B955-43D3-8B39-269A629D4B09}"/>
               </a:ext>
             </a:extLst>
           </p:cNvPr>
@@ -9572,7 +9580,7 @@
           <p:cNvPr id="10" name="">
             <a:extLst xmlns:a="http://schemas.openxmlformats.org/drawingml/2006/main">
               <a:ext uri="{FF2B5EF4-FFF2-40B4-BE49-F238E27FC236}">
-                <a16:creationId xmlns:a16="http://schemas.microsoft.com/office/drawing/2014/main" id="{2D006484-E9E6-453E-B9C6-6B3E0CDA2119}"/>
+                <a16:creationId xmlns:a16="http://schemas.microsoft.com/office/drawing/2014/main" id="{F237B127-2F3C-466B-8BA0-DD361975DF4A}"/>
               </a:ext>
             </a:extLst>
           </p:cNvPr>
@@ -9629,7 +9637,7 @@
           <p:cNvPr id="11" name="">
             <a:extLst xmlns:a="http://schemas.openxmlformats.org/drawingml/2006/main">
               <a:ext uri="{FF2B5EF4-FFF2-40B4-BE49-F238E27FC236}">
-                <a16:creationId xmlns:a16="http://schemas.microsoft.com/office/drawing/2014/main" id="{D181284C-7BB9-40BA-837E-443B3C41E812}"/>
+                <a16:creationId xmlns:a16="http://schemas.microsoft.com/office/drawing/2014/main" id="{90700170-3147-44CB-A8F5-5ECE61298FD8}"/>
               </a:ext>
             </a:extLst>
           </p:cNvPr>
@@ -9686,7 +9694,7 @@
           <p:cNvPr id="12" name="">
             <a:extLst xmlns:a="http://schemas.openxmlformats.org/drawingml/2006/main">
               <a:ext uri="{FF2B5EF4-FFF2-40B4-BE49-F238E27FC236}">
-                <a16:creationId xmlns:a16="http://schemas.microsoft.com/office/drawing/2014/main" id="{B93E0E9E-00F8-400B-9543-2527F5BFD5DA}"/>
+                <a16:creationId xmlns:a16="http://schemas.microsoft.com/office/drawing/2014/main" id="{4CCBF19A-95F4-41FB-A233-C895A73C7FFA}"/>
               </a:ext>
             </a:extLst>
           </p:cNvPr>
@@ -9718,7 +9726,7 @@
           <p:cNvPr id="13" name="">
             <a:extLst xmlns:a="http://schemas.openxmlformats.org/drawingml/2006/main">
               <a:ext uri="{FF2B5EF4-FFF2-40B4-BE49-F238E27FC236}">
-                <a16:creationId xmlns:a16="http://schemas.microsoft.com/office/drawing/2014/main" id="{55CBB372-202D-4195-A28A-0DF3E31B7DA9}"/>
+                <a16:creationId xmlns:a16="http://schemas.microsoft.com/office/drawing/2014/main" id="{8B070938-0848-4720-B59B-794306EE96CA}"/>
               </a:ext>
             </a:extLst>
           </p:cNvPr>
@@ -9775,7 +9783,7 @@
           <p:cNvPr id="14" name="">
             <a:extLst xmlns:a="http://schemas.openxmlformats.org/drawingml/2006/main">
               <a:ext uri="{FF2B5EF4-FFF2-40B4-BE49-F238E27FC236}">
-                <a16:creationId xmlns:a16="http://schemas.microsoft.com/office/drawing/2014/main" id="{56C52F38-8D60-42C1-82F3-0BCB22D64D93}"/>
+                <a16:creationId xmlns:a16="http://schemas.microsoft.com/office/drawing/2014/main" id="{D8C09818-C956-4600-BF14-962326937E6D}"/>
               </a:ext>
             </a:extLst>
           </p:cNvPr>
@@ -9830,7 +9838,7 @@
     </p:spTree>
     <p:extLst>
       <p:ext uri="{BB962C8B-B14F-4D97-AF65-F5344CB8AC3E}">
-        <p14:creationId xmlns:p14="http://schemas.microsoft.com/office/powerpoint/2010/main" val="650519640"/>
+        <p14:creationId xmlns:p14="http://schemas.microsoft.com/office/powerpoint/2010/main" val="1489161327"/>
       </p:ext>
     </p:extLst>
   </p:cSld>
@@ -10031,7 +10039,7 @@
           <p:cNvPr id="16" name="">
             <a:extLst xmlns:a="http://schemas.openxmlformats.org/drawingml/2006/main">
               <a:ext uri="{FF2B5EF4-FFF2-40B4-BE49-F238E27FC236}">
-                <a16:creationId xmlns:a16="http://schemas.microsoft.com/office/drawing/2014/main" id="{B7B784E9-B6FC-490E-B496-942E285F4202}"/>
+                <a16:creationId xmlns:a16="http://schemas.microsoft.com/office/drawing/2014/main" id="{C6995943-A3C7-4E78-8B42-BFD9190E169A}"/>
               </a:ext>
             </a:extLst>
           </p:cNvPr>
@@ -10063,7 +10071,7 @@
           <p:cNvPr id="2" name="">
             <a:extLst xmlns:a="http://schemas.openxmlformats.org/drawingml/2006/main">
               <a:ext uri="{FF2B5EF4-FFF2-40B4-BE49-F238E27FC236}">
-                <a16:creationId xmlns:a16="http://schemas.microsoft.com/office/drawing/2014/main" id="{D921990B-5CBA-4EC3-99B7-55C56121C752}"/>
+                <a16:creationId xmlns:a16="http://schemas.microsoft.com/office/drawing/2014/main" id="{2AEEC0CB-638D-4889-BC21-C85FA1D346E9}"/>
               </a:ext>
             </a:extLst>
           </p:cNvPr>
@@ -10120,7 +10128,7 @@
           <p:cNvPr id="3" name="">
             <a:extLst xmlns:a="http://schemas.openxmlformats.org/drawingml/2006/main">
               <a:ext uri="{FF2B5EF4-FFF2-40B4-BE49-F238E27FC236}">
-                <a16:creationId xmlns:a16="http://schemas.microsoft.com/office/drawing/2014/main" id="{705B4A52-080C-4F84-B8DE-B8B59D63476B}"/>
+                <a16:creationId xmlns:a16="http://schemas.microsoft.com/office/drawing/2014/main" id="{E3BE4B44-A8D2-4EB5-8A8D-D28923DF50F0}"/>
               </a:ext>
             </a:extLst>
           </p:cNvPr>
@@ -10152,7 +10160,7 @@
           <p:cNvPr id="4" name="">
             <a:extLst xmlns:a="http://schemas.openxmlformats.org/drawingml/2006/main">
               <a:ext uri="{FF2B5EF4-FFF2-40B4-BE49-F238E27FC236}">
-                <a16:creationId xmlns:a16="http://schemas.microsoft.com/office/drawing/2014/main" id="{59BCB5BE-4A2C-4A00-96E4-7E7682CC79D1}"/>
+                <a16:creationId xmlns:a16="http://schemas.microsoft.com/office/drawing/2014/main" id="{B3E8E59D-392C-47C0-80D6-96A4DA71C6B2}"/>
               </a:ext>
             </a:extLst>
           </p:cNvPr>
@@ -10209,7 +10217,7 @@
           <p:cNvPr id="5" name="">
             <a:extLst xmlns:a="http://schemas.openxmlformats.org/drawingml/2006/main">
               <a:ext uri="{FF2B5EF4-FFF2-40B4-BE49-F238E27FC236}">
-                <a16:creationId xmlns:a16="http://schemas.microsoft.com/office/drawing/2014/main" id="{5982F57C-99AF-47C1-BCA6-75E822212714}"/>
+                <a16:creationId xmlns:a16="http://schemas.microsoft.com/office/drawing/2014/main" id="{6B4261CE-87E6-4E5D-BCA8-9B428E2C3E73}"/>
               </a:ext>
             </a:extLst>
           </p:cNvPr>
@@ -10266,7 +10274,7 @@
           <p:cNvPr id="6" name="">
             <a:extLst xmlns:a="http://schemas.openxmlformats.org/drawingml/2006/main">
               <a:ext uri="{FF2B5EF4-FFF2-40B4-BE49-F238E27FC236}">
-                <a16:creationId xmlns:a16="http://schemas.microsoft.com/office/drawing/2014/main" id="{6F17093F-E92A-45A7-8BBF-77DD6DDC4491}"/>
+                <a16:creationId xmlns:a16="http://schemas.microsoft.com/office/drawing/2014/main" id="{C0C2BE12-F334-4315-AC88-8A96CB2D8248}"/>
               </a:ext>
             </a:extLst>
           </p:cNvPr>
@@ -10323,7 +10331,7 @@
           <p:cNvPr id="7" name="">
             <a:extLst xmlns:a="http://schemas.openxmlformats.org/drawingml/2006/main">
               <a:ext uri="{FF2B5EF4-FFF2-40B4-BE49-F238E27FC236}">
-                <a16:creationId xmlns:a16="http://schemas.microsoft.com/office/drawing/2014/main" id="{56AC2791-F52F-4F77-B4BC-EFFA58158C09}"/>
+                <a16:creationId xmlns:a16="http://schemas.microsoft.com/office/drawing/2014/main" id="{034AD2AF-1EB6-4AB2-8B0A-5DF328694DBA}"/>
               </a:ext>
             </a:extLst>
           </p:cNvPr>
@@ -10355,7 +10363,7 @@
           <p:cNvPr id="8" name="">
             <a:extLst xmlns:a="http://schemas.openxmlformats.org/drawingml/2006/main">
               <a:ext uri="{FF2B5EF4-FFF2-40B4-BE49-F238E27FC236}">
-                <a16:creationId xmlns:a16="http://schemas.microsoft.com/office/drawing/2014/main" id="{C7927765-F879-4710-81F0-8EB2C1AB4F26}"/>
+                <a16:creationId xmlns:a16="http://schemas.microsoft.com/office/drawing/2014/main" id="{FFFC1E33-D9F4-4CEC-BD01-5F023C9CCAE8}"/>
               </a:ext>
             </a:extLst>
           </p:cNvPr>
@@ -10412,7 +10420,7 @@
           <p:cNvPr id="9" name="">
             <a:extLst xmlns:a="http://schemas.openxmlformats.org/drawingml/2006/main">
               <a:ext uri="{FF2B5EF4-FFF2-40B4-BE49-F238E27FC236}">
-                <a16:creationId xmlns:a16="http://schemas.microsoft.com/office/drawing/2014/main" id="{06103F5D-1008-4524-ACD7-7EE3B6E5E8A4}"/>
+                <a16:creationId xmlns:a16="http://schemas.microsoft.com/office/drawing/2014/main" id="{82AACC22-1A78-42CB-A6D6-76B0BD3B467B}"/>
               </a:ext>
             </a:extLst>
           </p:cNvPr>
@@ -10469,7 +10477,7 @@
           <p:cNvPr id="10" name="">
             <a:extLst xmlns:a="http://schemas.openxmlformats.org/drawingml/2006/main">
               <a:ext uri="{FF2B5EF4-FFF2-40B4-BE49-F238E27FC236}">
-                <a16:creationId xmlns:a16="http://schemas.microsoft.com/office/drawing/2014/main" id="{BCA1FDB2-1565-474C-9E0D-4A576600D394}"/>
+                <a16:creationId xmlns:a16="http://schemas.microsoft.com/office/drawing/2014/main" id="{6D046D33-CCE3-4006-97C6-CE04733FB083}"/>
               </a:ext>
             </a:extLst>
           </p:cNvPr>
@@ -10526,7 +10534,7 @@
           <p:cNvPr id="11" name="">
             <a:extLst xmlns:a="http://schemas.openxmlformats.org/drawingml/2006/main">
               <a:ext uri="{FF2B5EF4-FFF2-40B4-BE49-F238E27FC236}">
-                <a16:creationId xmlns:a16="http://schemas.microsoft.com/office/drawing/2014/main" id="{495F4D25-07AD-4974-AA2F-2F0BF669E5BB}"/>
+                <a16:creationId xmlns:a16="http://schemas.microsoft.com/office/drawing/2014/main" id="{77F49B09-78D7-4F87-B417-B5908F2F3B52}"/>
               </a:ext>
             </a:extLst>
           </p:cNvPr>
@@ -10583,7 +10591,7 @@
           <p:cNvPr id="12" name="">
             <a:extLst xmlns:a="http://schemas.openxmlformats.org/drawingml/2006/main">
               <a:ext uri="{FF2B5EF4-FFF2-40B4-BE49-F238E27FC236}">
-                <a16:creationId xmlns:a16="http://schemas.microsoft.com/office/drawing/2014/main" id="{F9A40BFC-73E9-4035-A814-86F79C13C7C8}"/>
+                <a16:creationId xmlns:a16="http://schemas.microsoft.com/office/drawing/2014/main" id="{8907E9C0-C7A2-427D-BD65-7E1DCA35B3B1}"/>
               </a:ext>
             </a:extLst>
           </p:cNvPr>
@@ -10640,7 +10648,7 @@
           <p:cNvPr id="13" name="">
             <a:extLst xmlns:a="http://schemas.openxmlformats.org/drawingml/2006/main">
               <a:ext uri="{FF2B5EF4-FFF2-40B4-BE49-F238E27FC236}">
-                <a16:creationId xmlns:a16="http://schemas.microsoft.com/office/drawing/2014/main" id="{2257F632-D9D3-47AA-BC87-BCAA42EB0737}"/>
+                <a16:creationId xmlns:a16="http://schemas.microsoft.com/office/drawing/2014/main" id="{7B034C41-E84C-4985-889D-B80A143025FF}"/>
               </a:ext>
             </a:extLst>
           </p:cNvPr>
@@ -10697,7 +10705,7 @@
           <p:cNvPr id="14" name="">
             <a:extLst xmlns:a="http://schemas.openxmlformats.org/drawingml/2006/main">
               <a:ext uri="{FF2B5EF4-FFF2-40B4-BE49-F238E27FC236}">
-                <a16:creationId xmlns:a16="http://schemas.microsoft.com/office/drawing/2014/main" id="{DE12A9B2-CC97-4BC7-91F6-B15FC3F491FD}"/>
+                <a16:creationId xmlns:a16="http://schemas.microsoft.com/office/drawing/2014/main" id="{C337321A-A276-454A-9764-A886C2B8EFA0}"/>
               </a:ext>
             </a:extLst>
           </p:cNvPr>
@@ -10754,7 +10762,7 @@
           <p:cNvPr id="15" name="">
             <a:extLst xmlns:a="http://schemas.openxmlformats.org/drawingml/2006/main">
               <a:ext uri="{FF2B5EF4-FFF2-40B4-BE49-F238E27FC236}">
-                <a16:creationId xmlns:a16="http://schemas.microsoft.com/office/drawing/2014/main" id="{85B42FDC-C36D-4F72-B345-07BEE819BC00}"/>
+                <a16:creationId xmlns:a16="http://schemas.microsoft.com/office/drawing/2014/main" id="{0A233F3E-75F2-43B9-8776-3D0845D5B69B}"/>
               </a:ext>
             </a:extLst>
           </p:cNvPr>
@@ -10809,7 +10817,7 @@
     </p:spTree>
     <p:extLst>
       <p:ext uri="{BB962C8B-B14F-4D97-AF65-F5344CB8AC3E}">
-        <p14:creationId xmlns:p14="http://schemas.microsoft.com/office/powerpoint/2010/main" val="1313829635"/>
+        <p14:creationId xmlns:p14="http://schemas.microsoft.com/office/powerpoint/2010/main" val="276490429"/>
       </p:ext>
     </p:extLst>
   </p:cSld>
@@ -10964,7 +10972,7 @@
           <p:cNvPr id="16" name="">
             <a:extLst xmlns:a="http://schemas.openxmlformats.org/drawingml/2006/main">
               <a:ext uri="{FF2B5EF4-FFF2-40B4-BE49-F238E27FC236}">
-                <a16:creationId xmlns:a16="http://schemas.microsoft.com/office/drawing/2014/main" id="{566C7E76-CA46-4BDB-AA86-03AE85A6E525}"/>
+                <a16:creationId xmlns:a16="http://schemas.microsoft.com/office/drawing/2014/main" id="{50C99374-41E5-4F94-A10F-8AED1A0F50EB}"/>
               </a:ext>
             </a:extLst>
           </p:cNvPr>
@@ -10996,7 +11004,7 @@
           <p:cNvPr id="2" name="">
             <a:extLst xmlns:a="http://schemas.openxmlformats.org/drawingml/2006/main">
               <a:ext uri="{FF2B5EF4-FFF2-40B4-BE49-F238E27FC236}">
-                <a16:creationId xmlns:a16="http://schemas.microsoft.com/office/drawing/2014/main" id="{95D3BFC2-4442-4573-BEB9-A76A7C034B0E}"/>
+                <a16:creationId xmlns:a16="http://schemas.microsoft.com/office/drawing/2014/main" id="{DC2BED92-7931-4D5F-B9DA-3A1B3DA4C624}"/>
               </a:ext>
             </a:extLst>
           </p:cNvPr>
@@ -11053,7 +11061,7 @@
           <p:cNvPr id="3" name="">
             <a:extLst xmlns:a="http://schemas.openxmlformats.org/drawingml/2006/main">
               <a:ext uri="{FF2B5EF4-FFF2-40B4-BE49-F238E27FC236}">
-                <a16:creationId xmlns:a16="http://schemas.microsoft.com/office/drawing/2014/main" id="{DEAA09B0-C43F-4AE1-815F-E735037016F7}"/>
+                <a16:creationId xmlns:a16="http://schemas.microsoft.com/office/drawing/2014/main" id="{B20B9510-9F11-427E-87A1-91DC29DE497A}"/>
               </a:ext>
             </a:extLst>
           </p:cNvPr>
@@ -11085,7 +11093,7 @@
           <p:cNvPr id="4" name="">
             <a:extLst xmlns:a="http://schemas.openxmlformats.org/drawingml/2006/main">
               <a:ext uri="{FF2B5EF4-FFF2-40B4-BE49-F238E27FC236}">
-                <a16:creationId xmlns:a16="http://schemas.microsoft.com/office/drawing/2014/main" id="{4587C324-DBFA-417D-A055-432A2272D7AB}"/>
+                <a16:creationId xmlns:a16="http://schemas.microsoft.com/office/drawing/2014/main" id="{76452E6D-2972-4AE3-BB94-AA2E913624E3}"/>
               </a:ext>
             </a:extLst>
           </p:cNvPr>
@@ -11142,7 +11150,7 @@
           <p:cNvPr id="5" name="">
             <a:extLst xmlns:a="http://schemas.openxmlformats.org/drawingml/2006/main">
               <a:ext uri="{FF2B5EF4-FFF2-40B4-BE49-F238E27FC236}">
-                <a16:creationId xmlns:a16="http://schemas.microsoft.com/office/drawing/2014/main" id="{042F54EB-3341-486E-84D4-1518AA63E561}"/>
+                <a16:creationId xmlns:a16="http://schemas.microsoft.com/office/drawing/2014/main" id="{B88E0688-8764-4734-8DD6-49844EB8B877}"/>
               </a:ext>
             </a:extLst>
           </p:cNvPr>
@@ -11199,7 +11207,7 @@
           <p:cNvPr id="6" name="">
             <a:extLst xmlns:a="http://schemas.openxmlformats.org/drawingml/2006/main">
               <a:ext uri="{FF2B5EF4-FFF2-40B4-BE49-F238E27FC236}">
-                <a16:creationId xmlns:a16="http://schemas.microsoft.com/office/drawing/2014/main" id="{159F78B8-3322-4A12-AF42-07237D2F5572}"/>
+                <a16:creationId xmlns:a16="http://schemas.microsoft.com/office/drawing/2014/main" id="{6A1A6B31-2D29-4CEF-A3A5-888E6A0D5849}"/>
               </a:ext>
             </a:extLst>
           </p:cNvPr>
@@ -11256,7 +11264,7 @@
           <p:cNvPr id="7" name="">
             <a:extLst xmlns:a="http://schemas.openxmlformats.org/drawingml/2006/main">
               <a:ext uri="{FF2B5EF4-FFF2-40B4-BE49-F238E27FC236}">
-                <a16:creationId xmlns:a16="http://schemas.microsoft.com/office/drawing/2014/main" id="{86045462-E4A2-4079-804F-1C03FF2D792A}"/>
+                <a16:creationId xmlns:a16="http://schemas.microsoft.com/office/drawing/2014/main" id="{DAE536B7-F72D-4588-BF34-CA9023065A4E}"/>
               </a:ext>
             </a:extLst>
           </p:cNvPr>
@@ -11288,7 +11296,7 @@
           <p:cNvPr id="8" name="">
             <a:extLst xmlns:a="http://schemas.openxmlformats.org/drawingml/2006/main">
               <a:ext uri="{FF2B5EF4-FFF2-40B4-BE49-F238E27FC236}">
-                <a16:creationId xmlns:a16="http://schemas.microsoft.com/office/drawing/2014/main" id="{5A25327D-F2BC-4BEF-8C09-6E4A793FC439}"/>
+                <a16:creationId xmlns:a16="http://schemas.microsoft.com/office/drawing/2014/main" id="{2CD30E67-40B9-4F26-99A9-FFC872ED3F1C}"/>
               </a:ext>
             </a:extLst>
           </p:cNvPr>
@@ -11345,7 +11353,7 @@
           <p:cNvPr id="9" name="">
             <a:extLst xmlns:a="http://schemas.openxmlformats.org/drawingml/2006/main">
               <a:ext uri="{FF2B5EF4-FFF2-40B4-BE49-F238E27FC236}">
-                <a16:creationId xmlns:a16="http://schemas.microsoft.com/office/drawing/2014/main" id="{B64CBEFC-268D-4277-8CD4-34E72307B2C4}"/>
+                <a16:creationId xmlns:a16="http://schemas.microsoft.com/office/drawing/2014/main" id="{C9548B7B-F823-4D2E-9381-C8AB29BD5EBE}"/>
               </a:ext>
             </a:extLst>
           </p:cNvPr>
@@ -11406,7 +11414,7 @@
           <p:nvPr/>
         </p:nvPicPr>
         <p:blipFill>
-          <a:blip xmlns:r="http://schemas.openxmlformats.org/officeDocument/2006/relationships" xmlns:a="http://schemas.openxmlformats.org/drawingml/2006/main" r:embed="Rde1ef21b41ef4e0c"/>
+          <a:blip xmlns:r="http://schemas.openxmlformats.org/officeDocument/2006/relationships" xmlns:a="http://schemas.openxmlformats.org/drawingml/2006/main" r:embed="R644e5d0f6bec4b6e"/>
           <a:stretch xmlns:a="http://schemas.openxmlformats.org/drawingml/2006/main"/>
         </p:blipFill>
         <p:spPr>
@@ -11424,7 +11432,7 @@
           <p:cNvPr id="11" name="">
             <a:extLst xmlns:a="http://schemas.openxmlformats.org/drawingml/2006/main">
               <a:ext uri="{FF2B5EF4-FFF2-40B4-BE49-F238E27FC236}">
-                <a16:creationId xmlns:a16="http://schemas.microsoft.com/office/drawing/2014/main" id="{CD2CDFD8-431B-4C09-ACC7-49EB6292CDA1}"/>
+                <a16:creationId xmlns:a16="http://schemas.microsoft.com/office/drawing/2014/main" id="{FBD29441-53F5-4671-BBEF-19C2BFC558C9}"/>
               </a:ext>
             </a:extLst>
           </p:cNvPr>
@@ -11481,7 +11489,7 @@
           <p:cNvPr id="12" name="">
             <a:extLst xmlns:a="http://schemas.openxmlformats.org/drawingml/2006/main">
               <a:ext uri="{FF2B5EF4-FFF2-40B4-BE49-F238E27FC236}">
-                <a16:creationId xmlns:a16="http://schemas.microsoft.com/office/drawing/2014/main" id="{489C9F20-1C9C-4663-BF7D-FC01AB06B1D5}"/>
+                <a16:creationId xmlns:a16="http://schemas.microsoft.com/office/drawing/2014/main" id="{55BBE318-C80C-4F9D-9292-1DF7E205633F}"/>
               </a:ext>
             </a:extLst>
           </p:cNvPr>
@@ -11538,7 +11546,7 @@
           <p:cNvPr id="13" name="">
             <a:extLst xmlns:a="http://schemas.openxmlformats.org/drawingml/2006/main">
               <a:ext uri="{FF2B5EF4-FFF2-40B4-BE49-F238E27FC236}">
-                <a16:creationId xmlns:a16="http://schemas.microsoft.com/office/drawing/2014/main" id="{B904B48A-4731-41CB-B6B2-38B9963CAD8D}"/>
+                <a16:creationId xmlns:a16="http://schemas.microsoft.com/office/drawing/2014/main" id="{846B66E8-6796-4234-AACC-217677F71095}"/>
               </a:ext>
             </a:extLst>
           </p:cNvPr>
@@ -11570,7 +11578,7 @@
           <p:cNvPr id="14" name="">
             <a:extLst xmlns:a="http://schemas.openxmlformats.org/drawingml/2006/main">
               <a:ext uri="{FF2B5EF4-FFF2-40B4-BE49-F238E27FC236}">
-                <a16:creationId xmlns:a16="http://schemas.microsoft.com/office/drawing/2014/main" id="{4F15A2C9-466C-4EB7-9219-67067B5EEB5D}"/>
+                <a16:creationId xmlns:a16="http://schemas.microsoft.com/office/drawing/2014/main" id="{7ADCE75D-A4B8-4F00-BF1E-F51FBAE12C06}"/>
               </a:ext>
             </a:extLst>
           </p:cNvPr>
@@ -11627,7 +11635,7 @@
           <p:cNvPr id="15" name="">
             <a:extLst xmlns:a="http://schemas.openxmlformats.org/drawingml/2006/main">
               <a:ext uri="{FF2B5EF4-FFF2-40B4-BE49-F238E27FC236}">
-                <a16:creationId xmlns:a16="http://schemas.microsoft.com/office/drawing/2014/main" id="{8AB21D71-E7A3-4C39-A853-DC85EF1B61B5}"/>
+                <a16:creationId xmlns:a16="http://schemas.microsoft.com/office/drawing/2014/main" id="{C8307B62-2230-45B2-9140-1DDBD841582C}"/>
               </a:ext>
             </a:extLst>
           </p:cNvPr>
@@ -11682,7 +11690,7 @@
     </p:spTree>
     <p:extLst>
       <p:ext uri="{BB962C8B-B14F-4D97-AF65-F5344CB8AC3E}">
-        <p14:creationId xmlns:p14="http://schemas.microsoft.com/office/powerpoint/2010/main" val="777287053"/>
+        <p14:creationId xmlns:p14="http://schemas.microsoft.com/office/powerpoint/2010/main" val="320370871"/>
       </p:ext>
     </p:extLst>
   </p:cSld>
@@ -11837,7 +11845,7 @@
           <p:cNvPr id="23" name="">
             <a:extLst xmlns:a="http://schemas.openxmlformats.org/drawingml/2006/main">
               <a:ext uri="{FF2B5EF4-FFF2-40B4-BE49-F238E27FC236}">
-                <a16:creationId xmlns:a16="http://schemas.microsoft.com/office/drawing/2014/main" id="{1ADDB8AB-F4BE-4638-A5FB-9003FAD303D4}"/>
+                <a16:creationId xmlns:a16="http://schemas.microsoft.com/office/drawing/2014/main" id="{9D9D6A50-10C2-45B4-8ABB-435195E59B16}"/>
               </a:ext>
             </a:extLst>
           </p:cNvPr>
@@ -11869,7 +11877,7 @@
           <p:cNvPr id="2" name="">
             <a:extLst xmlns:a="http://schemas.openxmlformats.org/drawingml/2006/main">
               <a:ext uri="{FF2B5EF4-FFF2-40B4-BE49-F238E27FC236}">
-                <a16:creationId xmlns:a16="http://schemas.microsoft.com/office/drawing/2014/main" id="{67F52664-439F-426E-B5FD-C4F4078065D1}"/>
+                <a16:creationId xmlns:a16="http://schemas.microsoft.com/office/drawing/2014/main" id="{957F6151-B0DC-421B-B0A3-DFF516CF283B}"/>
               </a:ext>
             </a:extLst>
           </p:cNvPr>
@@ -11926,7 +11934,7 @@
           <p:cNvPr id="3" name="">
             <a:extLst xmlns:a="http://schemas.openxmlformats.org/drawingml/2006/main">
               <a:ext uri="{FF2B5EF4-FFF2-40B4-BE49-F238E27FC236}">
-                <a16:creationId xmlns:a16="http://schemas.microsoft.com/office/drawing/2014/main" id="{6DE11366-B885-4052-90B2-E7CD927AAEDE}"/>
+                <a16:creationId xmlns:a16="http://schemas.microsoft.com/office/drawing/2014/main" id="{789B11FF-D4D4-4156-AC4A-9C0F39FBD183}"/>
               </a:ext>
             </a:extLst>
           </p:cNvPr>
@@ -11958,7 +11966,7 @@
           <p:cNvPr id="4" name="">
             <a:extLst xmlns:a="http://schemas.openxmlformats.org/drawingml/2006/main">
               <a:ext uri="{FF2B5EF4-FFF2-40B4-BE49-F238E27FC236}">
-                <a16:creationId xmlns:a16="http://schemas.microsoft.com/office/drawing/2014/main" id="{F8AC6027-C3FD-45AE-8BF6-AAB069BD5B7E}"/>
+                <a16:creationId xmlns:a16="http://schemas.microsoft.com/office/drawing/2014/main" id="{567E8EF3-AE3C-44DA-BF8E-5BE0C26F9D45}"/>
               </a:ext>
             </a:extLst>
           </p:cNvPr>
@@ -12015,7 +12023,7 @@
           <p:cNvPr id="5" name="">
             <a:extLst xmlns:a="http://schemas.openxmlformats.org/drawingml/2006/main">
               <a:ext uri="{FF2B5EF4-FFF2-40B4-BE49-F238E27FC236}">
-                <a16:creationId xmlns:a16="http://schemas.microsoft.com/office/drawing/2014/main" id="{150F64CA-0729-45BB-B032-D90119555B72}"/>
+                <a16:creationId xmlns:a16="http://schemas.microsoft.com/office/drawing/2014/main" id="{F4F97F65-E3D6-49AD-B426-BC89001C1A11}"/>
               </a:ext>
             </a:extLst>
           </p:cNvPr>
@@ -12072,7 +12080,7 @@
           <p:cNvPr id="6" name="">
             <a:extLst xmlns:a="http://schemas.openxmlformats.org/drawingml/2006/main">
               <a:ext uri="{FF2B5EF4-FFF2-40B4-BE49-F238E27FC236}">
-                <a16:creationId xmlns:a16="http://schemas.microsoft.com/office/drawing/2014/main" id="{934A8807-F67D-42AD-B16A-059649089EF9}"/>
+                <a16:creationId xmlns:a16="http://schemas.microsoft.com/office/drawing/2014/main" id="{64AC1A3C-8EA7-42E7-9C93-57073EA31635}"/>
               </a:ext>
             </a:extLst>
           </p:cNvPr>
@@ -12129,7 +12137,7 @@
           <p:cNvPr id="7" name="">
             <a:extLst xmlns:a="http://schemas.openxmlformats.org/drawingml/2006/main">
               <a:ext uri="{FF2B5EF4-FFF2-40B4-BE49-F238E27FC236}">
-                <a16:creationId xmlns:a16="http://schemas.microsoft.com/office/drawing/2014/main" id="{43EC763E-E38F-4062-BA74-65636578EB9C}"/>
+                <a16:creationId xmlns:a16="http://schemas.microsoft.com/office/drawing/2014/main" id="{F06CDDB0-6005-45E1-95C6-B56F5D71BFC8}"/>
               </a:ext>
             </a:extLst>
           </p:cNvPr>
@@ -12161,7 +12169,7 @@
           <p:cNvPr id="8" name="">
             <a:extLst xmlns:a="http://schemas.openxmlformats.org/drawingml/2006/main">
               <a:ext uri="{FF2B5EF4-FFF2-40B4-BE49-F238E27FC236}">
-                <a16:creationId xmlns:a16="http://schemas.microsoft.com/office/drawing/2014/main" id="{5966F81F-F9BD-4708-BFF1-3EB0ABE32683}"/>
+                <a16:creationId xmlns:a16="http://schemas.microsoft.com/office/drawing/2014/main" id="{1FAF4C75-1821-4A4C-B7FD-B9E8EF58DF10}"/>
               </a:ext>
             </a:extLst>
           </p:cNvPr>
@@ -12218,7 +12226,7 @@
           <p:cNvPr id="9" name="">
             <a:extLst xmlns:a="http://schemas.openxmlformats.org/drawingml/2006/main">
               <a:ext uri="{FF2B5EF4-FFF2-40B4-BE49-F238E27FC236}">
-                <a16:creationId xmlns:a16="http://schemas.microsoft.com/office/drawing/2014/main" id="{7AA5AFBB-1A11-4E57-9D81-620E2CA102B7}"/>
+                <a16:creationId xmlns:a16="http://schemas.microsoft.com/office/drawing/2014/main" id="{2F8F8233-9423-4211-9826-685C87347CF0}"/>
               </a:ext>
             </a:extLst>
           </p:cNvPr>
@@ -12275,7 +12283,7 @@
           <p:cNvPr id="10" name="">
             <a:extLst xmlns:a="http://schemas.openxmlformats.org/drawingml/2006/main">
               <a:ext uri="{FF2B5EF4-FFF2-40B4-BE49-F238E27FC236}">
-                <a16:creationId xmlns:a16="http://schemas.microsoft.com/office/drawing/2014/main" id="{E4C08536-9530-4400-904D-34DF263C9B49}"/>
+                <a16:creationId xmlns:a16="http://schemas.microsoft.com/office/drawing/2014/main" id="{60B3D37C-E5D8-4079-AD0A-1AF4EB11EE8C}"/>
               </a:ext>
             </a:extLst>
           </p:cNvPr>
@@ -12309,7 +12317,7 @@
           <p:cNvPr id="11" name="">
             <a:extLst xmlns:a="http://schemas.openxmlformats.org/drawingml/2006/main">
               <a:ext uri="{FF2B5EF4-FFF2-40B4-BE49-F238E27FC236}">
-                <a16:creationId xmlns:a16="http://schemas.microsoft.com/office/drawing/2014/main" id="{161EB283-B474-4B6D-A060-E5BA8284A8DB}"/>
+                <a16:creationId xmlns:a16="http://schemas.microsoft.com/office/drawing/2014/main" id="{0B2F6C65-A77E-439B-BF5E-DF1EFC5BD1EF}"/>
               </a:ext>
             </a:extLst>
           </p:cNvPr>
@@ -12341,7 +12349,7 @@
           <p:cNvPr id="12" name="">
             <a:extLst xmlns:a="http://schemas.openxmlformats.org/drawingml/2006/main">
               <a:ext uri="{FF2B5EF4-FFF2-40B4-BE49-F238E27FC236}">
-                <a16:creationId xmlns:a16="http://schemas.microsoft.com/office/drawing/2014/main" id="{4E8739BE-D539-4D11-8FDB-14CCB8A4CB90}"/>
+                <a16:creationId xmlns:a16="http://schemas.microsoft.com/office/drawing/2014/main" id="{58FD9DDD-4229-4758-8DA0-6AE5D3D21409}"/>
               </a:ext>
             </a:extLst>
           </p:cNvPr>
@@ -12398,7 +12406,7 @@
           <p:cNvPr id="13" name="">
             <a:extLst xmlns:a="http://schemas.openxmlformats.org/drawingml/2006/main">
               <a:ext uri="{FF2B5EF4-FFF2-40B4-BE49-F238E27FC236}">
-                <a16:creationId xmlns:a16="http://schemas.microsoft.com/office/drawing/2014/main" id="{E621BE32-237D-4427-A1D2-3BA0887AAAE7}"/>
+                <a16:creationId xmlns:a16="http://schemas.microsoft.com/office/drawing/2014/main" id="{71274424-4649-47B6-9288-46818EE2429A}"/>
               </a:ext>
             </a:extLst>
           </p:cNvPr>
@@ -12455,7 +12463,7 @@
           <p:cNvPr id="14" name="">
             <a:extLst xmlns:a="http://schemas.openxmlformats.org/drawingml/2006/main">
               <a:ext uri="{FF2B5EF4-FFF2-40B4-BE49-F238E27FC236}">
-                <a16:creationId xmlns:a16="http://schemas.microsoft.com/office/drawing/2014/main" id="{857543EC-F1F9-4227-ADF9-93B530A9FF08}"/>
+                <a16:creationId xmlns:a16="http://schemas.microsoft.com/office/drawing/2014/main" id="{1EBB5EF4-3C9B-495C-BCD4-176A469ECF3F}"/>
               </a:ext>
             </a:extLst>
           </p:cNvPr>
@@ -12489,7 +12497,7 @@
           <p:cNvPr id="15" name="">
             <a:extLst xmlns:a="http://schemas.openxmlformats.org/drawingml/2006/main">
               <a:ext uri="{FF2B5EF4-FFF2-40B4-BE49-F238E27FC236}">
-                <a16:creationId xmlns:a16="http://schemas.microsoft.com/office/drawing/2014/main" id="{215A42D5-EE95-4E73-836E-35B31E302B7B}"/>
+                <a16:creationId xmlns:a16="http://schemas.microsoft.com/office/drawing/2014/main" id="{DDF5479F-D125-4A97-A1C1-EB0561EE4186}"/>
               </a:ext>
             </a:extLst>
           </p:cNvPr>
@@ -12521,7 +12529,7 @@
           <p:cNvPr id="16" name="">
             <a:extLst xmlns:a="http://schemas.openxmlformats.org/drawingml/2006/main">
               <a:ext uri="{FF2B5EF4-FFF2-40B4-BE49-F238E27FC236}">
-                <a16:creationId xmlns:a16="http://schemas.microsoft.com/office/drawing/2014/main" id="{BBF9C429-8BA9-4982-94E6-F193CA847E62}"/>
+                <a16:creationId xmlns:a16="http://schemas.microsoft.com/office/drawing/2014/main" id="{2479E039-815F-4A96-B7E7-CCE3304EE064}"/>
               </a:ext>
             </a:extLst>
           </p:cNvPr>
@@ -12578,7 +12586,7 @@
           <p:cNvPr id="17" name="">
             <a:extLst xmlns:a="http://schemas.openxmlformats.org/drawingml/2006/main">
               <a:ext uri="{FF2B5EF4-FFF2-40B4-BE49-F238E27FC236}">
-                <a16:creationId xmlns:a16="http://schemas.microsoft.com/office/drawing/2014/main" id="{1C1FD95D-F0D9-4EF6-911E-4DCB61C3CC90}"/>
+                <a16:creationId xmlns:a16="http://schemas.microsoft.com/office/drawing/2014/main" id="{335A12F4-275B-417F-B439-B1D62C6D498F}"/>
               </a:ext>
             </a:extLst>
           </p:cNvPr>
@@ -12635,7 +12643,7 @@
           <p:cNvPr id="18" name="">
             <a:extLst xmlns:a="http://schemas.openxmlformats.org/drawingml/2006/main">
               <a:ext uri="{FF2B5EF4-FFF2-40B4-BE49-F238E27FC236}">
-                <a16:creationId xmlns:a16="http://schemas.microsoft.com/office/drawing/2014/main" id="{9BB9886D-C3C4-4335-B015-8DDC955D51C0}"/>
+                <a16:creationId xmlns:a16="http://schemas.microsoft.com/office/drawing/2014/main" id="{56CC052C-6E32-4B2C-8A26-6ACE617A32D3}"/>
               </a:ext>
             </a:extLst>
           </p:cNvPr>
@@ -12669,7 +12677,7 @@
           <p:cNvPr id="19" name="">
             <a:extLst xmlns:a="http://schemas.openxmlformats.org/drawingml/2006/main">
               <a:ext uri="{FF2B5EF4-FFF2-40B4-BE49-F238E27FC236}">
-                <a16:creationId xmlns:a16="http://schemas.microsoft.com/office/drawing/2014/main" id="{A8AD2734-7C8C-420C-957C-58256EB890A1}"/>
+                <a16:creationId xmlns:a16="http://schemas.microsoft.com/office/drawing/2014/main" id="{9AE0C14A-0482-4323-9E9A-A1FA6F4830D4}"/>
               </a:ext>
             </a:extLst>
           </p:cNvPr>
@@ -12701,7 +12709,7 @@
           <p:cNvPr id="20" name="">
             <a:extLst xmlns:a="http://schemas.openxmlformats.org/drawingml/2006/main">
               <a:ext uri="{FF2B5EF4-FFF2-40B4-BE49-F238E27FC236}">
-                <a16:creationId xmlns:a16="http://schemas.microsoft.com/office/drawing/2014/main" id="{B67C29CB-1C1A-4EC2-AC6D-C2FBD9EE80FD}"/>
+                <a16:creationId xmlns:a16="http://schemas.microsoft.com/office/drawing/2014/main" id="{EB928403-CB79-447B-9FD8-3DB9733ACFE8}"/>
               </a:ext>
             </a:extLst>
           </p:cNvPr>
@@ -12758,7 +12766,7 @@
           <p:cNvPr id="21" name="">
             <a:extLst xmlns:a="http://schemas.openxmlformats.org/drawingml/2006/main">
               <a:ext uri="{FF2B5EF4-FFF2-40B4-BE49-F238E27FC236}">
-                <a16:creationId xmlns:a16="http://schemas.microsoft.com/office/drawing/2014/main" id="{1FCA5022-EC89-4988-8807-503F113880DB}"/>
+                <a16:creationId xmlns:a16="http://schemas.microsoft.com/office/drawing/2014/main" id="{88B64789-25E6-4703-8BAD-BD92C499EBE5}"/>
               </a:ext>
             </a:extLst>
           </p:cNvPr>
@@ -12815,7 +12823,7 @@
           <p:cNvPr id="22" name="">
             <a:extLst xmlns:a="http://schemas.openxmlformats.org/drawingml/2006/main">
               <a:ext uri="{FF2B5EF4-FFF2-40B4-BE49-F238E27FC236}">
-                <a16:creationId xmlns:a16="http://schemas.microsoft.com/office/drawing/2014/main" id="{E3C0F77D-D01B-4B55-BE67-67251D0C022C}"/>
+                <a16:creationId xmlns:a16="http://schemas.microsoft.com/office/drawing/2014/main" id="{3AD2B0F9-EF13-4673-A26E-F0AB569AE23C}"/>
               </a:ext>
             </a:extLst>
           </p:cNvPr>
@@ -12870,7 +12878,7 @@
     </p:spTree>
     <p:extLst>
       <p:ext uri="{BB962C8B-B14F-4D97-AF65-F5344CB8AC3E}">
-        <p14:creationId xmlns:p14="http://schemas.microsoft.com/office/powerpoint/2010/main" val="1616013055"/>
+        <p14:creationId xmlns:p14="http://schemas.microsoft.com/office/powerpoint/2010/main" val="351837487"/>
       </p:ext>
     </p:extLst>
   </p:cSld>
@@ -13071,7 +13079,7 @@
           <p:cNvPr id="22" name="">
             <a:extLst xmlns:a="http://schemas.openxmlformats.org/drawingml/2006/main">
               <a:ext uri="{FF2B5EF4-FFF2-40B4-BE49-F238E27FC236}">
-                <a16:creationId xmlns:a16="http://schemas.microsoft.com/office/drawing/2014/main" id="{DFB735EA-0407-4DB7-9A45-FFE37A497850}"/>
+                <a16:creationId xmlns:a16="http://schemas.microsoft.com/office/drawing/2014/main" id="{FAD72B61-EC3E-4C5B-A8E1-7881700CBC01}"/>
               </a:ext>
             </a:extLst>
           </p:cNvPr>
@@ -13103,7 +13111,7 @@
           <p:cNvPr id="2" name="">
             <a:extLst xmlns:a="http://schemas.openxmlformats.org/drawingml/2006/main">
               <a:ext uri="{FF2B5EF4-FFF2-40B4-BE49-F238E27FC236}">
-                <a16:creationId xmlns:a16="http://schemas.microsoft.com/office/drawing/2014/main" id="{EA33B1E9-6238-4832-9C71-52415CCB7465}"/>
+                <a16:creationId xmlns:a16="http://schemas.microsoft.com/office/drawing/2014/main" id="{9DD2694D-F6D1-4BE7-A0CB-5EB013ECA2F8}"/>
               </a:ext>
             </a:extLst>
           </p:cNvPr>
@@ -13160,7 +13168,7 @@
           <p:cNvPr id="3" name="">
             <a:extLst xmlns:a="http://schemas.openxmlformats.org/drawingml/2006/main">
               <a:ext uri="{FF2B5EF4-FFF2-40B4-BE49-F238E27FC236}">
-                <a16:creationId xmlns:a16="http://schemas.microsoft.com/office/drawing/2014/main" id="{413E0C5D-82F3-4A8E-B627-50A85E85D38E}"/>
+                <a16:creationId xmlns:a16="http://schemas.microsoft.com/office/drawing/2014/main" id="{B25C317E-B7AC-4727-8C49-C3A7072430F8}"/>
               </a:ext>
             </a:extLst>
           </p:cNvPr>
@@ -13192,7 +13200,7 @@
           <p:cNvPr id="4" name="">
             <a:extLst xmlns:a="http://schemas.openxmlformats.org/drawingml/2006/main">
               <a:ext uri="{FF2B5EF4-FFF2-40B4-BE49-F238E27FC236}">
-                <a16:creationId xmlns:a16="http://schemas.microsoft.com/office/drawing/2014/main" id="{59597C00-72AE-46F7-8496-C178BAD16DA5}"/>
+                <a16:creationId xmlns:a16="http://schemas.microsoft.com/office/drawing/2014/main" id="{73379714-7D8F-4276-A2BE-E7A4DD04011D}"/>
               </a:ext>
             </a:extLst>
           </p:cNvPr>
@@ -13249,7 +13257,7 @@
           <p:cNvPr id="5" name="">
             <a:extLst xmlns:a="http://schemas.openxmlformats.org/drawingml/2006/main">
               <a:ext uri="{FF2B5EF4-FFF2-40B4-BE49-F238E27FC236}">
-                <a16:creationId xmlns:a16="http://schemas.microsoft.com/office/drawing/2014/main" id="{FCB0C82E-6660-4130-86DB-94FB2EB514F9}"/>
+                <a16:creationId xmlns:a16="http://schemas.microsoft.com/office/drawing/2014/main" id="{81786BC9-80A4-4962-B90A-9C192ACC7E6D}"/>
               </a:ext>
             </a:extLst>
           </p:cNvPr>
@@ -13306,7 +13314,7 @@
           <p:cNvPr id="6" name="">
             <a:extLst xmlns:a="http://schemas.openxmlformats.org/drawingml/2006/main">
               <a:ext uri="{FF2B5EF4-FFF2-40B4-BE49-F238E27FC236}">
-                <a16:creationId xmlns:a16="http://schemas.microsoft.com/office/drawing/2014/main" id="{52A1EA70-AAB5-4C8F-BE2F-D094A2030F53}"/>
+                <a16:creationId xmlns:a16="http://schemas.microsoft.com/office/drawing/2014/main" id="{D82C1A5B-A2E2-40F9-A4EC-EFF94258E548}"/>
               </a:ext>
             </a:extLst>
           </p:cNvPr>
@@ -13363,7 +13371,7 @@
           <p:cNvPr id="7" name="">
             <a:extLst xmlns:a="http://schemas.openxmlformats.org/drawingml/2006/main">
               <a:ext uri="{FF2B5EF4-FFF2-40B4-BE49-F238E27FC236}">
-                <a16:creationId xmlns:a16="http://schemas.microsoft.com/office/drawing/2014/main" id="{1C6A31ED-63F2-446E-B0F0-5BA29B36F82A}"/>
+                <a16:creationId xmlns:a16="http://schemas.microsoft.com/office/drawing/2014/main" id="{6F1B5FD6-B769-4861-A803-C13A434577D9}"/>
               </a:ext>
             </a:extLst>
           </p:cNvPr>
@@ -13395,7 +13403,7 @@
           <p:cNvPr id="8" name="">
             <a:extLst xmlns:a="http://schemas.openxmlformats.org/drawingml/2006/main">
               <a:ext uri="{FF2B5EF4-FFF2-40B4-BE49-F238E27FC236}">
-                <a16:creationId xmlns:a16="http://schemas.microsoft.com/office/drawing/2014/main" id="{DAA0AC8A-FE7D-4C04-B179-C8DEACE7E76B}"/>
+                <a16:creationId xmlns:a16="http://schemas.microsoft.com/office/drawing/2014/main" id="{237D9981-80EE-4391-9130-43F1A650D26F}"/>
               </a:ext>
             </a:extLst>
           </p:cNvPr>
@@ -13452,7 +13460,7 @@
           <p:cNvPr id="9" name="">
             <a:extLst xmlns:a="http://schemas.openxmlformats.org/drawingml/2006/main">
               <a:ext uri="{FF2B5EF4-FFF2-40B4-BE49-F238E27FC236}">
-                <a16:creationId xmlns:a16="http://schemas.microsoft.com/office/drawing/2014/main" id="{CC665771-98B0-42FD-A269-ED3B4A592305}"/>
+                <a16:creationId xmlns:a16="http://schemas.microsoft.com/office/drawing/2014/main" id="{4EB95B81-5C0A-4095-AA6E-D9C0E6DAF91F}"/>
               </a:ext>
             </a:extLst>
           </p:cNvPr>
@@ -13509,7 +13517,7 @@
           <p:cNvPr id="10" name="">
             <a:extLst xmlns:a="http://schemas.openxmlformats.org/drawingml/2006/main">
               <a:ext uri="{FF2B5EF4-FFF2-40B4-BE49-F238E27FC236}">
-                <a16:creationId xmlns:a16="http://schemas.microsoft.com/office/drawing/2014/main" id="{AACF41DB-7FD2-45FF-8A85-4A6BB17E6C70}"/>
+                <a16:creationId xmlns:a16="http://schemas.microsoft.com/office/drawing/2014/main" id="{083A0E26-01EA-4288-9FA3-1C91CC6ED506}"/>
               </a:ext>
             </a:extLst>
           </p:cNvPr>
@@ -13543,7 +13551,7 @@
           <p:cNvPr id="11" name="">
             <a:extLst xmlns:a="http://schemas.openxmlformats.org/drawingml/2006/main">
               <a:ext uri="{FF2B5EF4-FFF2-40B4-BE49-F238E27FC236}">
-                <a16:creationId xmlns:a16="http://schemas.microsoft.com/office/drawing/2014/main" id="{84B40884-8F59-43C0-9E40-9AA73A6A9759}"/>
+                <a16:creationId xmlns:a16="http://schemas.microsoft.com/office/drawing/2014/main" id="{20508EB8-9FDA-4B0A-AF78-BB480A85D4F6}"/>
               </a:ext>
             </a:extLst>
           </p:cNvPr>
@@ -13575,7 +13583,7 @@
           <p:cNvPr id="12" name="">
             <a:extLst xmlns:a="http://schemas.openxmlformats.org/drawingml/2006/main">
               <a:ext uri="{FF2B5EF4-FFF2-40B4-BE49-F238E27FC236}">
-                <a16:creationId xmlns:a16="http://schemas.microsoft.com/office/drawing/2014/main" id="{A648EAAF-DB20-47CE-915F-612D024A4D83}"/>
+                <a16:creationId xmlns:a16="http://schemas.microsoft.com/office/drawing/2014/main" id="{ED6CDA73-BA42-49D5-A210-71D2887A83DC}"/>
               </a:ext>
             </a:extLst>
           </p:cNvPr>
@@ -13632,7 +13640,7 @@
           <p:cNvPr id="13" name="">
             <a:extLst xmlns:a="http://schemas.openxmlformats.org/drawingml/2006/main">
               <a:ext uri="{FF2B5EF4-FFF2-40B4-BE49-F238E27FC236}">
-                <a16:creationId xmlns:a16="http://schemas.microsoft.com/office/drawing/2014/main" id="{5E8B6E6E-1DFB-4711-8DA6-B62CA52FF79B}"/>
+                <a16:creationId xmlns:a16="http://schemas.microsoft.com/office/drawing/2014/main" id="{60F45145-CFC4-4D63-A81A-432F8B05ED9A}"/>
               </a:ext>
             </a:extLst>
           </p:cNvPr>
@@ -13689,7 +13697,7 @@
           <p:cNvPr id="14" name="">
             <a:extLst xmlns:a="http://schemas.openxmlformats.org/drawingml/2006/main">
               <a:ext uri="{FF2B5EF4-FFF2-40B4-BE49-F238E27FC236}">
-                <a16:creationId xmlns:a16="http://schemas.microsoft.com/office/drawing/2014/main" id="{10513275-4EAD-4C10-8704-49D2B9C65812}"/>
+                <a16:creationId xmlns:a16="http://schemas.microsoft.com/office/drawing/2014/main" id="{1F32FBDD-223D-4E10-9A6B-8BCAE0C7889A}"/>
               </a:ext>
             </a:extLst>
           </p:cNvPr>
@@ -13723,7 +13731,7 @@
           <p:cNvPr id="15" name="">
             <a:extLst xmlns:a="http://schemas.openxmlformats.org/drawingml/2006/main">
               <a:ext uri="{FF2B5EF4-FFF2-40B4-BE49-F238E27FC236}">
-                <a16:creationId xmlns:a16="http://schemas.microsoft.com/office/drawing/2014/main" id="{A1CDFE66-EEAB-496A-98C1-9FF32E17D1EA}"/>
+                <a16:creationId xmlns:a16="http://schemas.microsoft.com/office/drawing/2014/main" id="{D7F88B05-5ABB-4F6A-B759-FA2F0600897C}"/>
               </a:ext>
             </a:extLst>
           </p:cNvPr>
@@ -13755,7 +13763,7 @@
           <p:cNvPr id="16" name="">
             <a:extLst xmlns:a="http://schemas.openxmlformats.org/drawingml/2006/main">
               <a:ext uri="{FF2B5EF4-FFF2-40B4-BE49-F238E27FC236}">
-                <a16:creationId xmlns:a16="http://schemas.microsoft.com/office/drawing/2014/main" id="{7E545268-CD40-446C-9289-C759BC425F4F}"/>
+                <a16:creationId xmlns:a16="http://schemas.microsoft.com/office/drawing/2014/main" id="{4265EDD6-51D5-4F9E-8FAE-B959D8179FE0}"/>
               </a:ext>
             </a:extLst>
           </p:cNvPr>
@@ -13812,7 +13820,7 @@
           <p:cNvPr id="17" name="">
             <a:extLst xmlns:a="http://schemas.openxmlformats.org/drawingml/2006/main">
               <a:ext uri="{FF2B5EF4-FFF2-40B4-BE49-F238E27FC236}">
-                <a16:creationId xmlns:a16="http://schemas.microsoft.com/office/drawing/2014/main" id="{08B2588C-9DE4-4707-B423-ABF112150534}"/>
+                <a16:creationId xmlns:a16="http://schemas.microsoft.com/office/drawing/2014/main" id="{345B55D4-ED2E-49A5-A14F-B62C9771D60B}"/>
               </a:ext>
             </a:extLst>
           </p:cNvPr>
@@ -13869,7 +13877,7 @@
           <p:cNvPr id="18" name="">
             <a:extLst xmlns:a="http://schemas.openxmlformats.org/drawingml/2006/main">
               <a:ext uri="{FF2B5EF4-FFF2-40B4-BE49-F238E27FC236}">
-                <a16:creationId xmlns:a16="http://schemas.microsoft.com/office/drawing/2014/main" id="{0ADCF0E3-BBE8-43FF-8DED-B563F0B5C8A1}"/>
+                <a16:creationId xmlns:a16="http://schemas.microsoft.com/office/drawing/2014/main" id="{22BE120D-BCA6-407A-921C-1F976349CA65}"/>
               </a:ext>
             </a:extLst>
           </p:cNvPr>
@@ -13903,7 +13911,7 @@
           <p:cNvPr id="19" name="">
             <a:extLst xmlns:a="http://schemas.openxmlformats.org/drawingml/2006/main">
               <a:ext uri="{FF2B5EF4-FFF2-40B4-BE49-F238E27FC236}">
-                <a16:creationId xmlns:a16="http://schemas.microsoft.com/office/drawing/2014/main" id="{DD00247A-FB6F-423C-87BE-EA1D511A6ECF}"/>
+                <a16:creationId xmlns:a16="http://schemas.microsoft.com/office/drawing/2014/main" id="{AA166F23-169C-4752-B5BF-299382C93062}"/>
               </a:ext>
             </a:extLst>
           </p:cNvPr>
@@ -13935,7 +13943,7 @@
           <p:cNvPr id="20" name="">
             <a:extLst xmlns:a="http://schemas.openxmlformats.org/drawingml/2006/main">
               <a:ext uri="{FF2B5EF4-FFF2-40B4-BE49-F238E27FC236}">
-                <a16:creationId xmlns:a16="http://schemas.microsoft.com/office/drawing/2014/main" id="{87C16B23-FEB6-46F2-AE3B-AEDD5229801A}"/>
+                <a16:creationId xmlns:a16="http://schemas.microsoft.com/office/drawing/2014/main" id="{FF1A2E0D-F536-4AE3-A290-DBB793FF23F7}"/>
               </a:ext>
             </a:extLst>
           </p:cNvPr>
@@ -13992,7 +14000,7 @@
           <p:cNvPr id="21" name="">
             <a:extLst xmlns:a="http://schemas.openxmlformats.org/drawingml/2006/main">
               <a:ext uri="{FF2B5EF4-FFF2-40B4-BE49-F238E27FC236}">
-                <a16:creationId xmlns:a16="http://schemas.microsoft.com/office/drawing/2014/main" id="{E601F0BC-D751-46BD-AB10-A73911BD3657}"/>
+                <a16:creationId xmlns:a16="http://schemas.microsoft.com/office/drawing/2014/main" id="{AFBEEB75-16C3-49B9-9D3B-085BD2A682F6}"/>
               </a:ext>
             </a:extLst>
           </p:cNvPr>
@@ -14047,7 +14055,7 @@
     </p:spTree>
     <p:extLst>
       <p:ext uri="{BB962C8B-B14F-4D97-AF65-F5344CB8AC3E}">
-        <p14:creationId xmlns:p14="http://schemas.microsoft.com/office/powerpoint/2010/main" val="896777206"/>
+        <p14:creationId xmlns:p14="http://schemas.microsoft.com/office/powerpoint/2010/main" val="501979699"/>
       </p:ext>
     </p:extLst>
   </p:cSld>
